--- a/Aniskwela-Grant-Pitch.pptx
+++ b/Aniskwela-Grant-Pitch.pptx
@@ -5,19 +5,20 @@
     <p:sldMasterId id="2147483648" r:id="rId1"/>
   </p:sldMasterIdLst>
   <p:notesMasterIdLst>
-    <p:notesMasterId r:id="rId12"/>
+    <p:notesMasterId r:id="rId13"/>
   </p:notesMasterIdLst>
   <p:sldIdLst>
     <p:sldId id="256" r:id="rId2"/>
     <p:sldId id="257" r:id="rId3"/>
-    <p:sldId id="258" r:id="rId4"/>
-    <p:sldId id="259" r:id="rId5"/>
-    <p:sldId id="260" r:id="rId6"/>
-    <p:sldId id="261" r:id="rId7"/>
-    <p:sldId id="262" r:id="rId8"/>
-    <p:sldId id="263" r:id="rId9"/>
-    <p:sldId id="264" r:id="rId10"/>
-    <p:sldId id="265" r:id="rId11"/>
+    <p:sldId id="266" r:id="rId4"/>
+    <p:sldId id="258" r:id="rId5"/>
+    <p:sldId id="259" r:id="rId6"/>
+    <p:sldId id="260" r:id="rId7"/>
+    <p:sldId id="261" r:id="rId8"/>
+    <p:sldId id="262" r:id="rId9"/>
+    <p:sldId id="263" r:id="rId10"/>
+    <p:sldId id="264" r:id="rId11"/>
+    <p:sldId id="265" r:id="rId12"/>
   </p:sldIdLst>
   <p:sldSz cx="12192000" cy="6858000"/>
   <p:notesSz cx="6858000" cy="9144000"/>
@@ -399,6 +400,108 @@
           <a:lstStyle/>
           <a:p>
             <a:r>
+              <a:t>Under the hood we use a stack chosen for speed, cost, and honesty about constraints.</a:t>
+            </a:r>
+          </a:p>
+          <a:p>
+            <a:endParaRPr/>
+          </a:p>
+          <a:p>
+            <a:r>
+              <a:t>The app is Next.js sixteen on Vercel. Auth, database, and storage run on Supabase with row-level security on every table. Teachers only see their drafts; learners only see their own progress rows when those flows ship.</a:t>
+            </a:r>
+          </a:p>
+          <a:p>
+            <a:endParaRPr/>
+          </a:p>
+          <a:p>
+            <a:r>
+              <a:t>AI goes through Azure AI Foundry with GPT five point four for course generation and the mini model for cheap repair tasks. Managed Identity in production, API key only for local development.</a:t>
+            </a:r>
+          </a:p>
+          <a:p>
+            <a:endParaRPr/>
+          </a:p>
+          <a:p>
+            <a:r>
+              <a:t>The initial migration defines nine tables: profiles, courses, lessons, quiz questions, enrollments, merit ledger, badges, credentials, and grant programs. Several are wired in schema today and waiting for application code.</a:t>
+            </a:r>
+          </a:p>
+          <a:p>
+            <a:endParaRPr/>
+          </a:p>
+          <a:p>
+            <a:r>
+              <a:t>Performance is a requirement, not a nice-to-have. Light theme, system fonts, no web font download on first paint, images capped at eighty kilobytes WebP where we use them.</a:t>
+            </a:r>
+          </a:p>
+        </p:txBody>
+      </p:sp>
+      <p:sp>
+        <p:nvSpPr>
+          <p:cNvPr id="4" name="Slide Number Placeholder 3"/>
+          <p:cNvSpPr>
+            <a:spLocks noGrp="1"/>
+          </p:cNvSpPr>
+          <p:nvPr>
+            <p:ph type="sldNum" sz="quarter" idx="5"/>
+          </p:nvPr>
+        </p:nvSpPr>
+        <p:spPr/>
+      </p:sp>
+    </p:spTree>
+  </p:cSld>
+  <p:clrMapOvr>
+    <a:masterClrMapping/>
+  </p:clrMapOvr>
+</p:notes>
+</file>
+
+<file path=ppt/notesSlides/notesSlide11.xml><?xml version="1.0" encoding="utf-8"?>
+<p:notes xmlns:a="http://schemas.openxmlformats.org/drawingml/2006/main" xmlns:r="http://schemas.openxmlformats.org/officeDocument/2006/relationships" xmlns:p="http://schemas.openxmlformats.org/presentationml/2006/main">
+  <p:cSld>
+    <p:spTree>
+      <p:nvGrpSpPr>
+        <p:cNvPr id="1" name=""/>
+        <p:cNvGrpSpPr/>
+        <p:nvPr/>
+      </p:nvGrpSpPr>
+      <p:grpSpPr>
+        <a:xfrm>
+          <a:off x="0" y="0"/>
+          <a:ext cx="0" cy="0"/>
+          <a:chOff x="0" y="0"/>
+          <a:chExt cx="0" cy="0"/>
+        </a:xfrm>
+      </p:grpSpPr>
+      <p:sp>
+        <p:nvSpPr>
+          <p:cNvPr id="2" name="Slide Image Placeholder 1"/>
+          <p:cNvSpPr>
+            <a:spLocks noGrp="1" noRot="1" noChangeAspect="1"/>
+          </p:cNvSpPr>
+          <p:nvPr>
+            <p:ph type="sldImg" idx="2"/>
+          </p:nvPr>
+        </p:nvSpPr>
+        <p:spPr/>
+      </p:sp>
+      <p:sp>
+        <p:nvSpPr>
+          <p:cNvPr id="3" name="Notes Placeholder 2"/>
+          <p:cNvSpPr>
+            <a:spLocks noGrp="1"/>
+          </p:cNvSpPr>
+          <p:nvPr>
+            <p:ph type="body" sz="quarter" idx="3"/>
+          </p:nvPr>
+        </p:nvSpPr>
+        <p:spPr/>
+        <p:txBody>
+          <a:bodyPr/>
+          <a:lstStyle/>
+          <a:p>
+            <a:r>
               <a:t>We are not asking you to fund a slide deck. We are asking for a conversation about a pilot.</a:t>
             </a:r>
           </a:p>
@@ -603,7 +706,7 @@
           <a:lstStyle/>
           <a:p>
             <a:r>
-              <a:t>Aniskwela addresses all three sides with one platform.</a:t>
+              <a:t>Before we show the product, let me quantify the opportunity.</a:t>
             </a:r>
           </a:p>
           <a:p>
@@ -611,7 +714,7 @@
           </a:p>
           <a:p>
             <a:r>
-              <a:t>First, teachers upload a PDF or document and our AI pipeline drafts a structured course. Nothing goes live until a teacher reviews it. We do not auto-publish.</a:t>
+              <a:t>The Registry System for Basic Sectors in Agriculture lists ten point seven million agricultural workers—nearly seven million farmers, two point seven million fisherfolk, plus farm workers and farm youth. Agriculture still employs about one in five Filipino workers according to PSA.</a:t>
             </a:r>
           </a:p>
           <a:p>
@@ -619,7 +722,7 @@
           </a:p>
           <a:p>
             <a:r>
-              <a:t>Second, learners study on a low-resource interface tuned for 3G and Filipino. Progress shows up as XP and levels, from Seed to Mentor. That record is cumulative. We do not burn or spend XP like a casino game.</a:t>
+              <a:t>At the same time, ninety-eight million Filipinos are online—eighty-four percent penetration—and most mobile connections run on 3G, 4G, or 5G. That is why we built for prepaid data and shared phones, not campus Wi-Fi.</a:t>
             </a:r>
           </a:p>
           <a:p>
@@ -627,7 +730,7 @@
           </a:p>
           <a:p>
             <a:r>
-              <a:t>Third, when a learner passes a course, we issue a W3C Verifiable Credential in the Open Badges 3.0 profile. Only a hash of that credential goes on Stellar. No personal data on the chain.</a:t>
+              <a:t>Public money for skills training already exists. TESDA spent roughly sixteen billion pesos on free tech-voc in twenty twenty-five, but fewer than one quarter of graduates went through scholarship vouchers. The funding pool is there; what is missing is transparent, merit-based targeting for rural farmers.</a:t>
             </a:r>
           </a:p>
           <a:p>
@@ -635,15 +738,7 @@
           </a:p>
           <a:p>
             <a:r>
-              <a:t>Fourth, funders define eligibility against the merit ledger. Aniskwela decides who qualifies. A licensed VASP moves money. We stay on the right side of regulation.</a:t>
-            </a:r>
-          </a:p>
-          <a:p>
-            <a:endParaRPr/>
-          </a:p>
-          <a:p>
-            <a:r>
-              <a:t>The engine can serve other subjects later, but we are farmer-first because that is where the need and our team's story align.</a:t>
+              <a:t>Our ninety-day wedge is modest: fifty courses, five hundred learners, one simulated grant program, and ten extension teachers through a partner network. That is what we are asking you to help us pilot.</a:t>
             </a:r>
           </a:p>
         </p:txBody>
@@ -713,7 +808,7 @@
           <a:lstStyle/>
           <a:p>
             <a:r>
-              <a:t>This is what a learner sees today. We already ship a course catalog and lesson reader that load quickly on a typical Philippine phone screen.</a:t>
+              <a:t>Aniskwela addresses all three sides with one platform.</a:t>
             </a:r>
           </a:p>
           <a:p>
@@ -721,7 +816,7 @@
           </a:p>
           <a:p>
             <a:r>
-              <a:t>The shared initial JavaScript bundle measures about one hundred seventy-four kilobytes gzipped, under our two hundred twenty kilobyte budget. Content is cached on the server so learners are not waiting on AI when they open a lesson.</a:t>
+              <a:t>First, teachers upload a PDF or document and our AI pipeline drafts a structured course. Nothing goes live until a teacher reviews it. We do not auto-publish.</a:t>
             </a:r>
           </a:p>
           <a:p>
@@ -729,7 +824,7 @@
           </a:p>
           <a:p>
             <a:r>
-              <a:t>Language toggles between English and Filipino without a full page reload. That matters when someone reads faster in Filipino but still wants English for certain terms.</a:t>
+              <a:t>Second, learners study on a low-resource interface tuned for 3G and Filipino. Progress shows up as XP and levels, from Seed to Mentor. That record is cumulative. We do not burn or spend XP like a casino game.</a:t>
             </a:r>
           </a:p>
           <a:p>
@@ -737,7 +832,7 @@
           </a:p>
           <a:p>
             <a:r>
-              <a:t>What is live now: browsing published courses, reading lessons, switching language.</a:t>
+              <a:t>Third, when a learner passes a course, we issue a W3C Verifiable Credential in the Open Badges 3.0 profile. Only a hash of that credential goes on Stellar. No personal data on the chain.</a:t>
             </a:r>
           </a:p>
           <a:p>
@@ -745,7 +840,7 @@
           </a:p>
           <a:p>
             <a:r>
-              <a:t>What is on the roadmap for this surface: interactive quizzes, XP and streak display, enrollments, and the credential wallet.</a:t>
+              <a:t>Fourth, funders define eligibility against the merit ledger. Aniskwela decides who qualifies. A licensed VASP moves money. We stay on the right side of regulation.</a:t>
             </a:r>
           </a:p>
           <a:p>
@@ -753,7 +848,7 @@
           </a:p>
           <a:p>
             <a:r>
-              <a:t>We label that honestly so you know what you can click today versus what we are building next.</a:t>
+              <a:t>The engine can serve other subjects later, but we are farmer-first because that is where the need and our team's story align.</a:t>
             </a:r>
           </a:p>
         </p:txBody>
@@ -823,7 +918,7 @@
           <a:lstStyle/>
           <a:p>
             <a:r>
-              <a:t>On the teacher side, the flow that works today is upload, generate, review, and publish.</a:t>
+              <a:t>This is what a learner sees today. We already ship a course catalog and lesson reader that load quickly on a typical Philippine phone screen.</a:t>
             </a:r>
           </a:p>
           <a:p>
@@ -831,7 +926,7 @@
           </a:p>
           <a:p>
             <a:r>
-              <a:t>A teacher signs in, uploads a PDF, and the server extracts text and calls Azure AI Foundry once per course. The model returns modules, lessons, and quiz questions. If the JSON fails validation, a smaller model tries one repair pass. If that still fails, we return an error. We never save garbage.</a:t>
+              <a:t>The shared initial JavaScript bundle measures about one hundred seventy-four kilobytes gzipped, under our two hundred twenty kilobyte budget. Content is cached on the server so learners are not waiting on AI when they open a lesson.</a:t>
             </a:r>
           </a:p>
           <a:p>
@@ -839,7 +934,7 @@
           </a:p>
           <a:p>
             <a:r>
-              <a:t>The teacher sees the draft in their dashboard and publishes when ready. Published courses appear in the public catalog.</a:t>
+              <a:t>Language toggles between English and Filipino without a full page reload. That matters when someone reads faster in Filipino but still wants English for certain terms.</a:t>
             </a:r>
           </a:p>
           <a:p>
@@ -847,7 +942,23 @@
           </a:p>
           <a:p>
             <a:r>
-              <a:t>The funder dashboard is not built yet, but the database already has grant program tables with a simulated flag. The design lets a program officer set criteria like agriculture learners above a certain XP threshold, preview the eligible list, and run a labelled simulation with an exportable audit trail. Real disbursement always routes through a licensed partner.</a:t>
+              <a:t>What is live now: browsing published courses, reading lessons, switching language.</a:t>
+            </a:r>
+          </a:p>
+          <a:p>
+            <a:endParaRPr/>
+          </a:p>
+          <a:p>
+            <a:r>
+              <a:t>What is on the roadmap for this surface: interactive quizzes, XP and streak display, enrollments, and the credential wallet.</a:t>
+            </a:r>
+          </a:p>
+          <a:p>
+            <a:endParaRPr/>
+          </a:p>
+          <a:p>
+            <a:r>
+              <a:t>We label that honestly so you know what you can click today versus what we are building next.</a:t>
             </a:r>
           </a:p>
         </p:txBody>
@@ -917,7 +1028,7 @@
           <a:lstStyle/>
           <a:p>
             <a:r>
-              <a:t>Here is the end-to-end story we are completing.</a:t>
+              <a:t>On the teacher side, the flow that works today is upload, generate, review, and publish.</a:t>
             </a:r>
           </a:p>
           <a:p>
@@ -925,7 +1036,7 @@
           </a:p>
           <a:p>
             <a:r>
-              <a:t>Step one: a teacher uploads source material.</a:t>
+              <a:t>A teacher signs in, uploads a PDF, and the server extracts text and calls Azure AI Foundry once per course. The model returns modules, lessons, and quiz questions. If the JSON fails validation, a smaller model tries one repair pass. If that still fails, we return an error. We never save garbage.</a:t>
             </a:r>
           </a:p>
           <a:p>
@@ -933,7 +1044,7 @@
           </a:p>
           <a:p>
             <a:r>
-              <a:t>Step two: Azure AI Foundry generates a structured draft. AI runs once per course, not on every page view.</a:t>
+              <a:t>The teacher sees the draft in their dashboard and publishes when ready. Published courses appear in the public catalog.</a:t>
             </a:r>
           </a:p>
           <a:p>
@@ -941,39 +1052,7 @@
           </a:p>
           <a:p>
             <a:r>
-              <a:t>Step three: the teacher edits if needed and publishes.</a:t>
-            </a:r>
-          </a:p>
-          <a:p>
-            <a:endParaRPr/>
-          </a:p>
-          <a:p>
-            <a:r>
-              <a:t>Step four: a learner studies lessons and takes assessments. We record completion in the merit ledger.</a:t>
-            </a:r>
-          </a:p>
-          <a:p>
-            <a:endParaRPr/>
-          </a:p>
-          <a:p>
-            <a:r>
-              <a:t>Step five: on pass, the platform issues a verifiable credential and signs it with our issuer key.</a:t>
-            </a:r>
-          </a:p>
-          <a:p>
-            <a:endParaRPr/>
-          </a:p>
-          <a:p>
-            <a:r>
-              <a:t>Step six: we anchor only the credential hash in a Stellar transaction. Anyone can verify the link between the credential and the chain entry without seeing private learner data on ledger.</a:t>
-            </a:r>
-          </a:p>
-          <a:p>
-            <a:endParaRPr/>
-          </a:p>
-          <a:p>
-            <a:r>
-              <a:t>If Testnet is down during a demo, we fall back to a clearly labelled mock anchor so learning never blocks on infrastructure.</a:t>
+              <a:t>The funder dashboard is not built yet, but the database already has grant program tables with a simulated flag. The design lets a program officer set criteria like agriculture learners above a certain XP threshold, preview the eligible list, and run a labelled simulation with an exportable audit trail. Real disbursement always routes through a licensed partner.</a:t>
             </a:r>
           </a:p>
         </p:txBody>
@@ -1043,7 +1122,7 @@
           <a:lstStyle/>
           <a:p>
             <a:r>
-              <a:t>This slide is about trust without hype.</a:t>
+              <a:t>Here is the end-to-end story we are completing.</a:t>
             </a:r>
           </a:p>
           <a:p>
@@ -1051,7 +1130,7 @@
           </a:p>
           <a:p>
             <a:r>
-              <a:t>The merit ledger is an append-only record of positive events: lesson completed, quiz passed, badge earned. XP never goes negative and never gets spent. Funders read that ledger when they ask who stayed consistent.</a:t>
+              <a:t>Step one: a teacher uploads source material.</a:t>
             </a:r>
           </a:p>
           <a:p>
@@ -1059,7 +1138,7 @@
           </a:p>
           <a:p>
             <a:r>
-              <a:t>Credentials follow open standards, not a proprietary badge NFT. Employers and other institutions can verify them with tools they already trust.</a:t>
+              <a:t>Step two: Azure AI Foundry generates a structured draft. AI runs once per course, not on every page view.</a:t>
             </a:r>
           </a:p>
           <a:p>
@@ -1067,7 +1146,7 @@
           </a:p>
           <a:p>
             <a:r>
-              <a:t>On-chain, we store a hash. That proves the credential existed at issuance time and was not altered afterward. We do not put names, emails, or grades in the memo.</a:t>
+              <a:t>Step three: the teacher edits if needed and publishes.</a:t>
             </a:r>
           </a:p>
           <a:p>
@@ -1075,7 +1154,31 @@
           </a:p>
           <a:p>
             <a:r>
-              <a:t>A public verifier page, no login required, will let anyone scan a QR or open a link and see valid or invalid with course, date, and score. That piece is specified and schema-ready; we are building it in the next sprint.</a:t>
+              <a:t>Step four: a learner studies lessons and takes assessments. We record completion in the merit ledger.</a:t>
+            </a:r>
+          </a:p>
+          <a:p>
+            <a:endParaRPr/>
+          </a:p>
+          <a:p>
+            <a:r>
+              <a:t>Step five: on pass, the platform issues a verifiable credential and signs it with our issuer key.</a:t>
+            </a:r>
+          </a:p>
+          <a:p>
+            <a:endParaRPr/>
+          </a:p>
+          <a:p>
+            <a:r>
+              <a:t>Step six: we anchor only the credential hash in a Stellar transaction. Anyone can verify the link between the credential and the chain entry without seeing private learner data on ledger.</a:t>
+            </a:r>
+          </a:p>
+          <a:p>
+            <a:endParaRPr/>
+          </a:p>
+          <a:p>
+            <a:r>
+              <a:t>If Testnet is down during a demo, we fall back to a clearly labelled mock anchor so learning never blocks on infrastructure.</a:t>
             </a:r>
           </a:p>
         </p:txBody>
@@ -1145,7 +1248,7 @@
           <a:lstStyle/>
           <a:p>
             <a:r>
-              <a:t>This is the slide most relevant to your work.</a:t>
+              <a:t>This slide is about trust without hype.</a:t>
             </a:r>
           </a:p>
           <a:p>
@@ -1153,7 +1256,7 @@
           </a:p>
           <a:p>
             <a:r>
-              <a:t>Aniskwela is not a money transmitter. We do not move pesos inside the app. We tell you who meets the criteria you set. Your licensed VASP or e-money partner executes payout.</a:t>
+              <a:t>The merit ledger is an append-only record of positive events: lesson completed, quiz passed, badge earned. XP never goes negative and never gets spent. Funders read that ledger when they ask who stayed consistent.</a:t>
             </a:r>
           </a:p>
           <a:p>
@@ -1161,7 +1264,7 @@
           </a:p>
           <a:p>
             <a:r>
-              <a:t>In the MVP, disbursement is a simulation. Every screen and export says so clearly. That lets you pilot policy, report to donors, and train staff before real funds flow.</a:t>
+              <a:t>Credentials follow open standards, not a proprietary badge NFT. Employers and other institutions can verify them with tools they already trust.</a:t>
             </a:r>
           </a:p>
           <a:p>
@@ -1169,7 +1272,7 @@
           </a:p>
           <a:p>
             <a:r>
-              <a:t>You might fund learners who completed an agriculture track, held a thirty-day streak, and earned a specific badge. The platform returns a list backed by ledger data, not self-reported forms.</a:t>
+              <a:t>On-chain, we store a hash. That proves the credential existed at issuance time and was not altered afterward. We do not put names, emails, or grades in the memo.</a:t>
             </a:r>
           </a:p>
           <a:p>
@@ -1177,15 +1280,7 @@
           </a:p>
           <a:p>
             <a:r>
-              <a:t>For compliance, we lean on row-level security in Postgres, server-side eligibility checks, and exportable audit logs. CLR work covers privacy and trademark next steps.</a:t>
-            </a:r>
-          </a:p>
-          <a:p>
-            <a:endParaRPr/>
-          </a:p>
-          <a:p>
-            <a:r>
-              <a:t>We are looking for one foundation or agency partner willing to co-design the first pilot program criteria.</a:t>
+              <a:t>A public verifier page, no login required, will let anyone scan a QR or open a link and see valid or invalid with course, date, and score. That piece is specified and schema-ready; we are building it in the next sprint.</a:t>
             </a:r>
           </a:p>
         </p:txBody>
@@ -1255,7 +1350,7 @@
           <a:lstStyle/>
           <a:p>
             <a:r>
-              <a:t>Under the hood we use a stack chosen for speed, cost, and honesty about constraints.</a:t>
+              <a:t>This is the slide most relevant to your work.</a:t>
             </a:r>
           </a:p>
           <a:p>
@@ -1263,7 +1358,7 @@
           </a:p>
           <a:p>
             <a:r>
-              <a:t>The app is Next.js sixteen on Vercel. Auth, database, and storage run on Supabase with row-level security on every table. Teachers only see their drafts; learners only see their own progress rows when those flows ship.</a:t>
+              <a:t>Aniskwela is not a money transmitter. We do not move pesos inside the app. We tell you who meets the criteria you set. Your licensed VASP or e-money partner executes payout.</a:t>
             </a:r>
           </a:p>
           <a:p>
@@ -1271,7 +1366,7 @@
           </a:p>
           <a:p>
             <a:r>
-              <a:t>AI goes through Azure AI Foundry with GPT five point four for course generation and the mini model for cheap repair tasks. Managed Identity in production, API key only for local development.</a:t>
+              <a:t>In the MVP, disbursement is a simulation. Every screen and export says so clearly. That lets you pilot policy, report to donors, and train staff before real funds flow.</a:t>
             </a:r>
           </a:p>
           <a:p>
@@ -1279,7 +1374,7 @@
           </a:p>
           <a:p>
             <a:r>
-              <a:t>The initial migration defines nine tables: profiles, courses, lessons, quiz questions, enrollments, merit ledger, badges, credentials, and grant programs. Several are wired in schema today and waiting for application code.</a:t>
+              <a:t>You might fund learners who completed an agriculture track, held a thirty-day streak, and earned a specific badge. The platform returns a list backed by ledger data, not self-reported forms.</a:t>
             </a:r>
           </a:p>
           <a:p>
@@ -1287,7 +1382,15 @@
           </a:p>
           <a:p>
             <a:r>
-              <a:t>Performance is a requirement, not a nice-to-have. Light theme, system fonts, no web font download on first paint, images capped at eighty kilobytes WebP where we use them.</a:t>
+              <a:t>For compliance, we lean on row-level security in Postgres, server-side eligibility checks, and exportable audit logs. CLR work covers privacy and trademark next steps.</a:t>
+            </a:r>
+          </a:p>
+          <a:p>
+            <a:endParaRPr/>
+          </a:p>
+          <a:p>
+            <a:r>
+              <a:t>We are looking for one foundation or agency partner willing to co-design the first pilot program criteria.</a:t>
             </a:r>
           </a:p>
         </p:txBody>
@@ -4588,13 +4691,7 @@
           <a:p>
             <a:pPr algn="r"/>
             <a:r>
-              <a:rPr sz="1000" b="0">
-                <a:solidFill>
-                  <a:srgbClr val="6E665B"/>
-                </a:solidFill>
-                <a:latin typeface="Segoe UI"/>
-              </a:rPr>
-              <a:t>Grant partner deck  ·  1/10</a:t>
+              <a:t>Grant partner deck  ·  1/11</a:t>
             </a:r>
           </a:p>
         </p:txBody>
@@ -4662,7 +4759,7 @@
                 </a:solidFill>
                 <a:latin typeface="Segoe UI"/>
               </a:rPr>
-              <a:t>NEXT STEP</a:t>
+              <a:t>TECHNOLOGY</a:t>
             </a:r>
           </a:p>
         </p:txBody>
@@ -4697,7 +4794,7 @@
                 </a:solidFill>
                 <a:latin typeface="Segoe UI"/>
               </a:rPr>
-              <a:t>Help us pilot with real farmers.</a:t>
+              <a:t>Honest stack for rural scale.</a:t>
             </a:r>
           </a:p>
         </p:txBody>
@@ -4732,7 +4829,7 @@
                 </a:solidFill>
                 <a:latin typeface="Segoe UI"/>
               </a:rPr>
-              <a:t>Co-design eligibility rules. Connect ten extension teachers. Give feedback when the verifier ships.</a:t>
+              <a:t>Next.js 16 on Vercel. Supabase with RLS on every table. Azure AI Foundry. Stellar for hash anchoring only.</a:t>
             </a:r>
           </a:p>
         </p:txBody>
@@ -4745,8 +4842,8 @@
         </p:nvSpPr>
         <p:spPr>
           <a:xfrm>
-            <a:off x="685800" y="2514600"/>
-            <a:ext cx="3200400" cy="1508760"/>
+            <a:off x="685800" y="2423160"/>
+            <a:ext cx="5029200" cy="868680"/>
           </a:xfrm>
           <a:prstGeom prst="roundRect">
             <a:avLst/>
@@ -4754,9 +4851,9 @@
           <a:solidFill>
             <a:srgbClr val="FFFFFF"/>
           </a:solidFill>
-          <a:ln w="25400">
+          <a:ln w="12700">
             <a:solidFill>
-              <a:srgbClr val="3F8E5B"/>
+              <a:srgbClr val="E7E0D3"/>
             </a:solidFill>
           </a:ln>
         </p:spPr>
@@ -4775,31 +4872,34 @@
           </a:fontRef>
         </p:style>
         <p:txBody>
-          <a:bodyPr rtlCol="0" anchor="ctr"/>
-          <a:lstStyle/>
+          <a:bodyPr wrap="square" lIns="137160" tIns="109728" rIns="137160" bIns="91440" rtlCol="0" anchor="ctr"/>
+          <a:lstStyle/>
+          <a:p>
+            <a:pPr algn="ctr">
+              <a:spcAft>
+                <a:spcPts val="600"/>
+              </a:spcAft>
+            </a:pPr>
+            <a:r>
+              <a:rPr sz="2000" b="1">
+                <a:solidFill>
+                  <a:srgbClr val="6B4F3A"/>
+                </a:solidFill>
+                <a:latin typeface="Segoe UI"/>
+              </a:rPr>
+              <a:t>Framework: Next.js 16.2 App Router</a:t>
+            </a:r>
+          </a:p>
           <a:p>
             <a:pPr algn="ctr"/>
             <a:r>
-              <a:rPr sz="3600" b="1">
-                <a:solidFill>
-                  <a:srgbClr val="3F8E5B"/>
-                </a:solidFill>
-                <a:latin typeface="Segoe UI"/>
-              </a:rPr>
-              <a:t>50</a:t>
-            </a:r>
-          </a:p>
-          <a:p>
-            <a:pPr algn="ctr"/>
-            <a:r>
-              <a:rPr sz="1200">
+              <a:rPr sz="1600">
                 <a:solidFill>
                   <a:srgbClr val="6E665B"/>
                 </a:solidFill>
                 <a:latin typeface="Segoe UI"/>
               </a:rPr>
-              <a:t>published courses
-(90 days)</a:t>
+              <a:t>Cache Components on public reads</a:t>
             </a:r>
           </a:p>
         </p:txBody>
@@ -4812,8 +4912,8 @@
         </p:nvSpPr>
         <p:spPr>
           <a:xfrm>
-            <a:off x="4206240" y="2514600"/>
-            <a:ext cx="3200400" cy="1508760"/>
+            <a:off x="685800" y="3383280"/>
+            <a:ext cx="5029200" cy="868680"/>
           </a:xfrm>
           <a:prstGeom prst="roundRect">
             <a:avLst/>
@@ -4821,9 +4921,9 @@
           <a:solidFill>
             <a:srgbClr val="FFFFFF"/>
           </a:solidFill>
-          <a:ln w="25400">
+          <a:ln w="12700">
             <a:solidFill>
-              <a:srgbClr val="3F8E5B"/>
+              <a:srgbClr val="E7E0D3"/>
             </a:solidFill>
           </a:ln>
         </p:spPr>
@@ -4842,31 +4942,34 @@
           </a:fontRef>
         </p:style>
         <p:txBody>
-          <a:bodyPr rtlCol="0" anchor="ctr"/>
-          <a:lstStyle/>
+          <a:bodyPr wrap="square" lIns="137160" tIns="109728" rIns="137160" bIns="91440" rtlCol="0" anchor="ctr"/>
+          <a:lstStyle/>
+          <a:p>
+            <a:pPr algn="ctr">
+              <a:spcAft>
+                <a:spcPts val="600"/>
+              </a:spcAft>
+            </a:pPr>
+            <a:r>
+              <a:rPr sz="2000" b="1">
+                <a:solidFill>
+                  <a:srgbClr val="6B4F3A"/>
+                </a:solidFill>
+                <a:latin typeface="Segoe UI"/>
+              </a:rPr>
+              <a:t>Data: Supabase Postgres</a:t>
+            </a:r>
+          </a:p>
           <a:p>
             <a:pPr algn="ctr"/>
             <a:r>
-              <a:rPr sz="3600" b="1">
-                <a:solidFill>
-                  <a:srgbClr val="3F8E5B"/>
-                </a:solidFill>
-                <a:latin typeface="Segoe UI"/>
-              </a:rPr>
-              <a:t>500</a:t>
-            </a:r>
-          </a:p>
-          <a:p>
-            <a:pPr algn="ctr"/>
-            <a:r>
-              <a:rPr sz="1200">
+              <a:rPr sz="1600">
                 <a:solidFill>
                   <a:srgbClr val="6E665B"/>
                 </a:solidFill>
                 <a:latin typeface="Segoe UI"/>
               </a:rPr>
-              <a:t>registered learners
-(90 days)</a:t>
+              <a:t>9 tables, RLS, auth SSR</a:t>
             </a:r>
           </a:p>
         </p:txBody>
@@ -4879,8 +4982,8 @@
         </p:nvSpPr>
         <p:spPr>
           <a:xfrm>
-            <a:off x="7726680" y="2514600"/>
-            <a:ext cx="3200400" cy="1508760"/>
+            <a:off x="685800" y="4343400"/>
+            <a:ext cx="5029200" cy="868680"/>
           </a:xfrm>
           <a:prstGeom prst="roundRect">
             <a:avLst/>
@@ -4888,9 +4991,9 @@
           <a:solidFill>
             <a:srgbClr val="FFFFFF"/>
           </a:solidFill>
-          <a:ln w="25400">
+          <a:ln w="12700">
             <a:solidFill>
-              <a:srgbClr val="3F8E5B"/>
+              <a:srgbClr val="E7E0D3"/>
             </a:solidFill>
           </a:ln>
         </p:spPr>
@@ -4909,53 +5012,56 @@
           </a:fontRef>
         </p:style>
         <p:txBody>
-          <a:bodyPr rtlCol="0" anchor="ctr"/>
-          <a:lstStyle/>
+          <a:bodyPr wrap="square" lIns="137160" tIns="109728" rIns="137160" bIns="91440" rtlCol="0" anchor="ctr"/>
+          <a:lstStyle/>
+          <a:p>
+            <a:pPr algn="ctr">
+              <a:spcAft>
+                <a:spcPts val="600"/>
+              </a:spcAft>
+            </a:pPr>
+            <a:r>
+              <a:rPr sz="2000" b="1">
+                <a:solidFill>
+                  <a:srgbClr val="6B4F3A"/>
+                </a:solidFill>
+                <a:latin typeface="Segoe UI"/>
+              </a:rPr>
+              <a:t>AI: Azure AI Foundry</a:t>
+            </a:r>
+          </a:p>
           <a:p>
             <a:pPr algn="ctr"/>
             <a:r>
-              <a:rPr sz="3600" b="1">
-                <a:solidFill>
-                  <a:srgbClr val="3F8E5B"/>
-                </a:solidFill>
-                <a:latin typeface="Segoe UI"/>
-              </a:rPr>
-              <a:t>1</a:t>
-            </a:r>
-          </a:p>
-          <a:p>
-            <a:pPr algn="ctr"/>
-            <a:r>
-              <a:rPr sz="1200">
+              <a:rPr sz="1600">
                 <a:solidFill>
                   <a:srgbClr val="6E665B"/>
                 </a:solidFill>
                 <a:latin typeface="Segoe UI"/>
               </a:rPr>
-              <a:t>simulated grant program
-with partner audit export</a:t>
-            </a:r>
-          </a:p>
-        </p:txBody>
-      </p:sp>
-      <p:sp>
-        <p:nvSpPr>
-          <p:cNvPr id="8" name="Rectangle 7"/>
+              <a:t>gpt-5.4 course gen · gpt-5.4-mini repair</a:t>
+            </a:r>
+          </a:p>
+        </p:txBody>
+      </p:sp>
+      <p:sp>
+        <p:nvSpPr>
+          <p:cNvPr id="8" name="Rounded Rectangle 7"/>
           <p:cNvSpPr/>
           <p:nvPr/>
         </p:nvSpPr>
         <p:spPr>
           <a:xfrm>
-            <a:off x="685800" y="4434840"/>
-            <a:ext cx="1234440" cy="1234440"/>
-          </a:xfrm>
-          <a:prstGeom prst="rect">
+            <a:off x="685800" y="5303520"/>
+            <a:ext cx="5029200" cy="868680"/>
+          </a:xfrm>
+          <a:prstGeom prst="roundRect">
             <a:avLst/>
           </a:prstGeom>
           <a:solidFill>
             <a:srgbClr val="FFFFFF"/>
           </a:solidFill>
-          <a:ln>
+          <a:ln w="12700">
             <a:solidFill>
               <a:srgbClr val="E7E0D3"/>
             </a:solidFill>
@@ -4976,6 +5082,649 @@
           </a:fontRef>
         </p:style>
         <p:txBody>
+          <a:bodyPr wrap="square" lIns="137160" tIns="109728" rIns="137160" bIns="91440" rtlCol="0" anchor="ctr"/>
+          <a:lstStyle/>
+          <a:p>
+            <a:pPr algn="ctr">
+              <a:spcAft>
+                <a:spcPts val="600"/>
+              </a:spcAft>
+            </a:pPr>
+            <a:r>
+              <a:rPr sz="2000" b="1">
+                <a:solidFill>
+                  <a:srgbClr val="6B4F3A"/>
+                </a:solidFill>
+                <a:latin typeface="Segoe UI"/>
+              </a:rPr>
+              <a:t>Chain: Stellar Testnet</a:t>
+            </a:r>
+          </a:p>
+          <a:p>
+            <a:pPr algn="ctr"/>
+            <a:r>
+              <a:rPr sz="1600">
+                <a:solidFill>
+                  <a:srgbClr val="6E665B"/>
+                </a:solidFill>
+                <a:latin typeface="Segoe UI"/>
+              </a:rPr>
+              <a:t>Hash-only memo · mock fallback flag</a:t>
+            </a:r>
+          </a:p>
+        </p:txBody>
+      </p:sp>
+      <p:sp>
+        <p:nvSpPr>
+          <p:cNvPr id="9" name="TextBox 8"/>
+          <p:cNvSpPr txBox="1"/>
+          <p:nvPr/>
+        </p:nvSpPr>
+        <p:spPr>
+          <a:xfrm>
+            <a:off x="6263640" y="2514600"/>
+            <a:ext cx="5257800" cy="2923877"/>
+          </a:xfrm>
+          <a:prstGeom prst="rect">
+            <a:avLst/>
+          </a:prstGeom>
+          <a:noFill/>
+        </p:spPr>
+        <p:txBody>
+          <a:bodyPr wrap="square">
+            <a:spAutoFit/>
+          </a:bodyPr>
+          <a:lstStyle/>
+          <a:p>
+            <a:pPr>
+              <a:spcAft>
+                <a:spcPts val="800"/>
+              </a:spcAft>
+            </a:pPr>
+            <a:r>
+              <a:rPr dirty="0">
+                <a:solidFill>
+                  <a:srgbClr val="241F1A"/>
+                </a:solidFill>
+                <a:latin typeface="Segoe UI"/>
+              </a:rPr>
+              <a:t>Initial JS ≤ 220 KB </a:t>
+            </a:r>
+            <a:r>
+              <a:rPr dirty="0" err="1">
+                <a:solidFill>
+                  <a:srgbClr val="241F1A"/>
+                </a:solidFill>
+                <a:latin typeface="Segoe UI"/>
+              </a:rPr>
+              <a:t>gzipped</a:t>
+            </a:r>
+            <a:br>
+              <a:rPr lang="en-US" dirty="0">
+                <a:solidFill>
+                  <a:srgbClr val="241F1A"/>
+                </a:solidFill>
+                <a:latin typeface="Segoe UI"/>
+              </a:rPr>
+            </a:br>
+            <a:r>
+              <a:rPr dirty="0">
+                <a:solidFill>
+                  <a:srgbClr val="241F1A"/>
+                </a:solidFill>
+                <a:latin typeface="Segoe UI"/>
+              </a:rPr>
+              <a:t>(measured ≈174 KB today)</a:t>
+            </a:r>
+          </a:p>
+          <a:p>
+            <a:pPr>
+              <a:spcAft>
+                <a:spcPts val="800"/>
+              </a:spcAft>
+            </a:pPr>
+            <a:endParaRPr lang="en-US" dirty="0">
+              <a:solidFill>
+                <a:srgbClr val="241F1A"/>
+              </a:solidFill>
+              <a:latin typeface="Segoe UI"/>
+            </a:endParaRPr>
+          </a:p>
+          <a:p>
+            <a:pPr>
+              <a:spcAft>
+                <a:spcPts val="800"/>
+              </a:spcAft>
+            </a:pPr>
+            <a:r>
+              <a:rPr dirty="0">
+                <a:solidFill>
+                  <a:srgbClr val="241F1A"/>
+                </a:solidFill>
+                <a:latin typeface="Segoe UI"/>
+              </a:rPr>
+              <a:t>Images ≤ 80 KB </a:t>
+            </a:r>
+            <a:r>
+              <a:rPr dirty="0" err="1">
+                <a:solidFill>
+                  <a:srgbClr val="241F1A"/>
+                </a:solidFill>
+                <a:latin typeface="Segoe UI"/>
+              </a:rPr>
+              <a:t>WebP</a:t>
+            </a:r>
+            <a:r>
+              <a:rPr dirty="0">
+                <a:solidFill>
+                  <a:srgbClr val="241F1A"/>
+                </a:solidFill>
+                <a:latin typeface="Segoe UI"/>
+              </a:rPr>
+              <a:t> on first load</a:t>
+            </a:r>
+          </a:p>
+          <a:p>
+            <a:pPr>
+              <a:spcAft>
+                <a:spcPts val="800"/>
+              </a:spcAft>
+            </a:pPr>
+            <a:endParaRPr lang="en-US" dirty="0">
+              <a:solidFill>
+                <a:srgbClr val="241F1A"/>
+              </a:solidFill>
+              <a:latin typeface="Segoe UI"/>
+            </a:endParaRPr>
+          </a:p>
+          <a:p>
+            <a:pPr>
+              <a:spcAft>
+                <a:spcPts val="800"/>
+              </a:spcAft>
+            </a:pPr>
+            <a:r>
+              <a:rPr dirty="0">
+                <a:solidFill>
+                  <a:srgbClr val="241F1A"/>
+                </a:solidFill>
+                <a:latin typeface="Segoe UI"/>
+              </a:rPr>
+              <a:t>Core content target &lt; 5 s on 3G</a:t>
+            </a:r>
+          </a:p>
+          <a:p>
+            <a:pPr>
+              <a:spcAft>
+                <a:spcPts val="800"/>
+              </a:spcAft>
+            </a:pPr>
+            <a:endParaRPr lang="en-US" dirty="0">
+              <a:solidFill>
+                <a:srgbClr val="241F1A"/>
+              </a:solidFill>
+              <a:latin typeface="Segoe UI"/>
+            </a:endParaRPr>
+          </a:p>
+          <a:p>
+            <a:pPr>
+              <a:spcAft>
+                <a:spcPts val="800"/>
+              </a:spcAft>
+            </a:pPr>
+            <a:r>
+              <a:rPr dirty="0">
+                <a:solidFill>
+                  <a:srgbClr val="241F1A"/>
+                </a:solidFill>
+                <a:latin typeface="Segoe UI"/>
+              </a:rPr>
+              <a:t>System fonts only · light theme · EN + Filipino</a:t>
+            </a:r>
+          </a:p>
+        </p:txBody>
+      </p:sp>
+      <p:sp>
+        <p:nvSpPr>
+          <p:cNvPr id="10" name="TextBox 9"/>
+          <p:cNvSpPr txBox="1"/>
+          <p:nvPr/>
+        </p:nvSpPr>
+        <p:spPr>
+          <a:xfrm>
+            <a:off x="548640" y="6446520"/>
+            <a:ext cx="4572000" cy="320040"/>
+          </a:xfrm>
+          <a:prstGeom prst="rect">
+            <a:avLst/>
+          </a:prstGeom>
+          <a:noFill/>
+        </p:spPr>
+        <p:txBody>
+          <a:bodyPr wrap="square" anchor="t">
+            <a:spAutoFit/>
+          </a:bodyPr>
+          <a:lstStyle/>
+          <a:p>
+            <a:pPr algn="l"/>
+            <a:r>
+              <a:rPr sz="1000" b="0">
+                <a:solidFill>
+                  <a:srgbClr val="6E665B"/>
+                </a:solidFill>
+                <a:latin typeface="Segoe UI"/>
+              </a:rPr>
+              <a:t>ANISKWELA  ·  Axon Enjin</a:t>
+            </a:r>
+          </a:p>
+        </p:txBody>
+      </p:sp>
+      <p:sp>
+        <p:nvSpPr>
+          <p:cNvPr id="11" name="TextBox 10"/>
+          <p:cNvSpPr txBox="1"/>
+          <p:nvPr/>
+        </p:nvSpPr>
+        <p:spPr>
+          <a:xfrm>
+            <a:off x="9601200" y="6446520"/>
+            <a:ext cx="2103120" cy="320040"/>
+          </a:xfrm>
+          <a:prstGeom prst="rect">
+            <a:avLst/>
+          </a:prstGeom>
+          <a:noFill/>
+        </p:spPr>
+        <p:txBody>
+          <a:bodyPr wrap="square" anchor="t">
+            <a:spAutoFit/>
+          </a:bodyPr>
+          <a:lstStyle/>
+          <a:p>
+            <a:pPr algn="r"/>
+            <a:r>
+              <a:t>Grant partner deck  ·  10/11</a:t>
+            </a:r>
+          </a:p>
+        </p:txBody>
+      </p:sp>
+    </p:spTree>
+  </p:cSld>
+  <p:clrMapOvr>
+    <a:masterClrMapping/>
+  </p:clrMapOvr>
+</p:sld>
+</file>
+
+<file path=ppt/slides/slide11.xml><?xml version="1.0" encoding="utf-8"?>
+<p:sld xmlns:a="http://schemas.openxmlformats.org/drawingml/2006/main" xmlns:r="http://schemas.openxmlformats.org/officeDocument/2006/relationships" xmlns:p="http://schemas.openxmlformats.org/presentationml/2006/main">
+  <p:cSld>
+    <p:bg>
+      <p:bgPr>
+        <a:solidFill>
+          <a:srgbClr val="FBF8F2"/>
+        </a:solidFill>
+        <a:effectLst/>
+      </p:bgPr>
+    </p:bg>
+    <p:spTree>
+      <p:nvGrpSpPr>
+        <p:cNvPr id="1" name=""/>
+        <p:cNvGrpSpPr/>
+        <p:nvPr/>
+      </p:nvGrpSpPr>
+      <p:grpSpPr>
+        <a:xfrm>
+          <a:off x="0" y="0"/>
+          <a:ext cx="0" cy="0"/>
+          <a:chOff x="0" y="0"/>
+          <a:chExt cx="0" cy="0"/>
+        </a:xfrm>
+      </p:grpSpPr>
+      <p:sp>
+        <p:nvSpPr>
+          <p:cNvPr id="2" name="TextBox 1"/>
+          <p:cNvSpPr txBox="1"/>
+          <p:nvPr/>
+        </p:nvSpPr>
+        <p:spPr>
+          <a:xfrm>
+            <a:off x="685800" y="502920"/>
+            <a:ext cx="3657600" cy="320040"/>
+          </a:xfrm>
+          <a:prstGeom prst="rect">
+            <a:avLst/>
+          </a:prstGeom>
+          <a:noFill/>
+        </p:spPr>
+        <p:txBody>
+          <a:bodyPr wrap="square" anchor="t">
+            <a:spAutoFit/>
+          </a:bodyPr>
+          <a:lstStyle/>
+          <a:p>
+            <a:pPr algn="l"/>
+            <a:r>
+              <a:rPr sz="1100" b="1">
+                <a:solidFill>
+                  <a:srgbClr val="3F8E5B"/>
+                </a:solidFill>
+                <a:latin typeface="Segoe UI"/>
+              </a:rPr>
+              <a:t>NEXT STEP</a:t>
+            </a:r>
+          </a:p>
+        </p:txBody>
+      </p:sp>
+      <p:sp>
+        <p:nvSpPr>
+          <p:cNvPr id="3" name="TextBox 2"/>
+          <p:cNvSpPr txBox="1"/>
+          <p:nvPr/>
+        </p:nvSpPr>
+        <p:spPr>
+          <a:xfrm>
+            <a:off x="685800" y="868680"/>
+            <a:ext cx="10515600" cy="822960"/>
+          </a:xfrm>
+          <a:prstGeom prst="rect">
+            <a:avLst/>
+          </a:prstGeom>
+          <a:noFill/>
+        </p:spPr>
+        <p:txBody>
+          <a:bodyPr wrap="square" anchor="t">
+            <a:spAutoFit/>
+          </a:bodyPr>
+          <a:lstStyle/>
+          <a:p>
+            <a:pPr algn="l"/>
+            <a:r>
+              <a:rPr sz="3200" b="1">
+                <a:solidFill>
+                  <a:srgbClr val="6B4F3A"/>
+                </a:solidFill>
+                <a:latin typeface="Segoe UI"/>
+              </a:rPr>
+              <a:t>Help us pilot with real farmers.</a:t>
+            </a:r>
+          </a:p>
+        </p:txBody>
+      </p:sp>
+      <p:sp>
+        <p:nvSpPr>
+          <p:cNvPr id="4" name="TextBox 3"/>
+          <p:cNvSpPr txBox="1"/>
+          <p:nvPr/>
+        </p:nvSpPr>
+        <p:spPr>
+          <a:xfrm>
+            <a:off x="685800" y="1600200"/>
+            <a:ext cx="10515600" cy="640080"/>
+          </a:xfrm>
+          <a:prstGeom prst="rect">
+            <a:avLst/>
+          </a:prstGeom>
+          <a:noFill/>
+        </p:spPr>
+        <p:txBody>
+          <a:bodyPr wrap="square" anchor="t">
+            <a:spAutoFit/>
+          </a:bodyPr>
+          <a:lstStyle/>
+          <a:p>
+            <a:pPr algn="l"/>
+            <a:r>
+              <a:rPr sz="1700" b="0">
+                <a:solidFill>
+                  <a:srgbClr val="6E665B"/>
+                </a:solidFill>
+                <a:latin typeface="Segoe UI"/>
+              </a:rPr>
+              <a:t>Co-design eligibility rules. Connect ten extension teachers. Give feedback when the verifier ships.</a:t>
+            </a:r>
+          </a:p>
+        </p:txBody>
+      </p:sp>
+      <p:sp>
+        <p:nvSpPr>
+          <p:cNvPr id="5" name="Rounded Rectangle 4"/>
+          <p:cNvSpPr/>
+          <p:nvPr/>
+        </p:nvSpPr>
+        <p:spPr>
+          <a:xfrm>
+            <a:off x="685800" y="2514600"/>
+            <a:ext cx="3200400" cy="1508760"/>
+          </a:xfrm>
+          <a:prstGeom prst="roundRect">
+            <a:avLst/>
+          </a:prstGeom>
+          <a:solidFill>
+            <a:srgbClr val="FFFFFF"/>
+          </a:solidFill>
+          <a:ln w="25400">
+            <a:solidFill>
+              <a:srgbClr val="3F8E5B"/>
+            </a:solidFill>
+          </a:ln>
+        </p:spPr>
+        <p:style>
+          <a:lnRef idx="1">
+            <a:schemeClr val="accent1"/>
+          </a:lnRef>
+          <a:fillRef idx="3">
+            <a:schemeClr val="accent1"/>
+          </a:fillRef>
+          <a:effectRef idx="2">
+            <a:schemeClr val="accent1"/>
+          </a:effectRef>
+          <a:fontRef idx="minor">
+            <a:schemeClr val="lt1"/>
+          </a:fontRef>
+        </p:style>
+        <p:txBody>
+          <a:bodyPr rtlCol="0" anchor="ctr"/>
+          <a:lstStyle/>
+          <a:p>
+            <a:pPr algn="ctr"/>
+            <a:r>
+              <a:rPr sz="3600" b="1">
+                <a:solidFill>
+                  <a:srgbClr val="3F8E5B"/>
+                </a:solidFill>
+                <a:latin typeface="Segoe UI"/>
+              </a:rPr>
+              <a:t>50</a:t>
+            </a:r>
+          </a:p>
+          <a:p>
+            <a:pPr algn="ctr"/>
+            <a:r>
+              <a:rPr sz="1200">
+                <a:solidFill>
+                  <a:srgbClr val="6E665B"/>
+                </a:solidFill>
+                <a:latin typeface="Segoe UI"/>
+              </a:rPr>
+              <a:t>published courses
+(90 days)</a:t>
+            </a:r>
+          </a:p>
+        </p:txBody>
+      </p:sp>
+      <p:sp>
+        <p:nvSpPr>
+          <p:cNvPr id="6" name="Rounded Rectangle 5"/>
+          <p:cNvSpPr/>
+          <p:nvPr/>
+        </p:nvSpPr>
+        <p:spPr>
+          <a:xfrm>
+            <a:off x="4206240" y="2514600"/>
+            <a:ext cx="3200400" cy="1508760"/>
+          </a:xfrm>
+          <a:prstGeom prst="roundRect">
+            <a:avLst/>
+          </a:prstGeom>
+          <a:solidFill>
+            <a:srgbClr val="FFFFFF"/>
+          </a:solidFill>
+          <a:ln w="25400">
+            <a:solidFill>
+              <a:srgbClr val="3F8E5B"/>
+            </a:solidFill>
+          </a:ln>
+        </p:spPr>
+        <p:style>
+          <a:lnRef idx="1">
+            <a:schemeClr val="accent1"/>
+          </a:lnRef>
+          <a:fillRef idx="3">
+            <a:schemeClr val="accent1"/>
+          </a:fillRef>
+          <a:effectRef idx="2">
+            <a:schemeClr val="accent1"/>
+          </a:effectRef>
+          <a:fontRef idx="minor">
+            <a:schemeClr val="lt1"/>
+          </a:fontRef>
+        </p:style>
+        <p:txBody>
+          <a:bodyPr rtlCol="0" anchor="ctr"/>
+          <a:lstStyle/>
+          <a:p>
+            <a:pPr algn="ctr"/>
+            <a:r>
+              <a:rPr sz="3600" b="1">
+                <a:solidFill>
+                  <a:srgbClr val="3F8E5B"/>
+                </a:solidFill>
+                <a:latin typeface="Segoe UI"/>
+              </a:rPr>
+              <a:t>500</a:t>
+            </a:r>
+          </a:p>
+          <a:p>
+            <a:pPr algn="ctr"/>
+            <a:r>
+              <a:rPr sz="1200">
+                <a:solidFill>
+                  <a:srgbClr val="6E665B"/>
+                </a:solidFill>
+                <a:latin typeface="Segoe UI"/>
+              </a:rPr>
+              <a:t>registered learners
+(90 days)</a:t>
+            </a:r>
+          </a:p>
+        </p:txBody>
+      </p:sp>
+      <p:sp>
+        <p:nvSpPr>
+          <p:cNvPr id="7" name="Rounded Rectangle 6"/>
+          <p:cNvSpPr/>
+          <p:nvPr/>
+        </p:nvSpPr>
+        <p:spPr>
+          <a:xfrm>
+            <a:off x="7726680" y="2514600"/>
+            <a:ext cx="3200400" cy="1508760"/>
+          </a:xfrm>
+          <a:prstGeom prst="roundRect">
+            <a:avLst/>
+          </a:prstGeom>
+          <a:solidFill>
+            <a:srgbClr val="FFFFFF"/>
+          </a:solidFill>
+          <a:ln w="25400">
+            <a:solidFill>
+              <a:srgbClr val="3F8E5B"/>
+            </a:solidFill>
+          </a:ln>
+        </p:spPr>
+        <p:style>
+          <a:lnRef idx="1">
+            <a:schemeClr val="accent1"/>
+          </a:lnRef>
+          <a:fillRef idx="3">
+            <a:schemeClr val="accent1"/>
+          </a:fillRef>
+          <a:effectRef idx="2">
+            <a:schemeClr val="accent1"/>
+          </a:effectRef>
+          <a:fontRef idx="minor">
+            <a:schemeClr val="lt1"/>
+          </a:fontRef>
+        </p:style>
+        <p:txBody>
+          <a:bodyPr rtlCol="0" anchor="ctr"/>
+          <a:lstStyle/>
+          <a:p>
+            <a:pPr algn="ctr"/>
+            <a:r>
+              <a:rPr sz="3600" b="1">
+                <a:solidFill>
+                  <a:srgbClr val="3F8E5B"/>
+                </a:solidFill>
+                <a:latin typeface="Segoe UI"/>
+              </a:rPr>
+              <a:t>1</a:t>
+            </a:r>
+          </a:p>
+          <a:p>
+            <a:pPr algn="ctr"/>
+            <a:r>
+              <a:rPr sz="1200">
+                <a:solidFill>
+                  <a:srgbClr val="6E665B"/>
+                </a:solidFill>
+                <a:latin typeface="Segoe UI"/>
+              </a:rPr>
+              <a:t>simulated grant program
+with partner audit export</a:t>
+            </a:r>
+          </a:p>
+        </p:txBody>
+      </p:sp>
+      <p:sp>
+        <p:nvSpPr>
+          <p:cNvPr id="8" name="Rectangle 7"/>
+          <p:cNvSpPr/>
+          <p:nvPr/>
+        </p:nvSpPr>
+        <p:spPr>
+          <a:xfrm>
+            <a:off x="685800" y="4434840"/>
+            <a:ext cx="1234440" cy="1234440"/>
+          </a:xfrm>
+          <a:prstGeom prst="rect">
+            <a:avLst/>
+          </a:prstGeom>
+          <a:solidFill>
+            <a:srgbClr val="FFFFFF"/>
+          </a:solidFill>
+          <a:ln>
+            <a:solidFill>
+              <a:srgbClr val="E7E0D3"/>
+            </a:solidFill>
+          </a:ln>
+        </p:spPr>
+        <p:style>
+          <a:lnRef idx="1">
+            <a:schemeClr val="accent1"/>
+          </a:lnRef>
+          <a:fillRef idx="3">
+            <a:schemeClr val="accent1"/>
+          </a:fillRef>
+          <a:effectRef idx="2">
+            <a:schemeClr val="accent1"/>
+          </a:effectRef>
+          <a:fontRef idx="minor">
+            <a:schemeClr val="lt1"/>
+          </a:fontRef>
+        </p:style>
+        <p:txBody>
           <a:bodyPr rtlCol="0" anchor="ctr"/>
           <a:lstStyle/>
           <a:p>
@@ -5197,13 +5946,7 @@
           <a:p>
             <a:pPr algn="r"/>
             <a:r>
-              <a:rPr sz="1000" b="0" dirty="0">
-                <a:solidFill>
-                  <a:srgbClr val="6E665B"/>
-                </a:solidFill>
-                <a:latin typeface="Segoe UI"/>
-              </a:rPr>
-              <a:t>Grant partner deck  ·  10/10</a:t>
+              <a:t>Grant partner deck  ·  11/11</a:t>
             </a:r>
           </a:p>
         </p:txBody>
@@ -5645,13 +6388,7 @@
           <a:p>
             <a:pPr algn="r"/>
             <a:r>
-              <a:rPr sz="1000" b="0">
-                <a:solidFill>
-                  <a:srgbClr val="6E665B"/>
-                </a:solidFill>
-                <a:latin typeface="Segoe UI"/>
-              </a:rPr>
-              <a:t>Grant partner deck  ·  2/10</a:t>
+              <a:t>Grant partner deck  ·  2/11</a:t>
             </a:r>
           </a:p>
         </p:txBody>
@@ -5719,7 +6456,7 @@
                 </a:solidFill>
                 <a:latin typeface="Segoe UI"/>
               </a:rPr>
-              <a:t>THE SOLUTION</a:t>
+              <a:t>THE OPPORTUNITY</a:t>
             </a:r>
           </a:p>
         </p:txBody>
@@ -5754,7 +6491,7 @@
                 </a:solidFill>
                 <a:latin typeface="Segoe UI"/>
               </a:rPr>
-              <a:t>Aniskwela: harvest school for Filipino farmers.</a:t>
+              <a:t>A farmer-first market that is already on mobile.</a:t>
             </a:r>
           </a:p>
         </p:txBody>
@@ -5768,7 +6505,7 @@
         <p:spPr>
           <a:xfrm>
             <a:off x="685800" y="1600200"/>
-            <a:ext cx="10515600" cy="338554"/>
+            <a:ext cx="10515600" cy="640080"/>
           </a:xfrm>
           <a:prstGeom prst="rect">
             <a:avLst/>
@@ -5783,13 +6520,13 @@
           <a:p>
             <a:pPr algn="l"/>
             <a:r>
-              <a:rPr sz="1600" b="0" dirty="0">
+              <a:rPr sz="1700" b="0">
                 <a:solidFill>
                   <a:srgbClr val="6E665B"/>
                 </a:solidFill>
                 <a:latin typeface="Segoe UI"/>
               </a:rPr>
-              <a:t>A content-agnostic learning engine, positioned farmer-first, with open credentials and a funder-ready merit ledger.</a:t>
+              <a:t>Millions of agricultural workers. Most Filipinos already online on mobile. Public skills funding exists but rarely reaches rural farmers with proof.</a:t>
             </a:r>
           </a:p>
         </p:txBody>
@@ -5802,8 +6539,8 @@
         </p:nvSpPr>
         <p:spPr>
           <a:xfrm>
-            <a:off x="685800" y="2423160"/>
-            <a:ext cx="5074920" cy="1691640"/>
+            <a:off x="685800" y="2331720"/>
+            <a:ext cx="5074920" cy="1600200"/>
           </a:xfrm>
           <a:prstGeom prst="roundRect">
             <a:avLst/>
@@ -5841,13 +6578,13 @@
               </a:spcAft>
             </a:pPr>
             <a:r>
-              <a:rPr sz="1200" b="1" dirty="0">
+              <a:rPr sz="1050" b="1">
                 <a:solidFill>
                   <a:srgbClr val="3F8E5B"/>
                 </a:solidFill>
                 <a:latin typeface="Segoe UI"/>
               </a:rPr>
-              <a:t>Live</a:t>
+              <a:t>TAM</a:t>
             </a:r>
           </a:p>
           <a:p>
@@ -5857,24 +6594,24 @@
               </a:spcAft>
             </a:pPr>
             <a:r>
-              <a:rPr sz="2400" b="1" dirty="0">
+              <a:rPr b="1">
                 <a:solidFill>
                   <a:srgbClr val="6B4F3A"/>
                 </a:solidFill>
                 <a:latin typeface="Segoe UI"/>
               </a:rPr>
-              <a:t>AI course generation</a:t>
-            </a:r>
-          </a:p>
-          <a:p>
-            <a:r>
-              <a:rPr dirty="0">
+              <a:t>10.7M agri workers (RSBSA)</a:t>
+            </a:r>
+          </a:p>
+          <a:p>
+            <a:r>
+              <a:rPr sz="1400">
                 <a:solidFill>
                   <a:srgbClr val="6E665B"/>
                 </a:solidFill>
                 <a:latin typeface="Segoe UI"/>
               </a:rPr>
-              <a:t>Teachers upload a PDF. Azure AI Foundry drafts modules and quizzes. Human review before publish.</a:t>
+              <a:t>6.8M farmers · 2.7M fisherfolk · ~2M farm workers · 328K farm youth. ~21% of employed Filipinos work in agriculture (PSA).</a:t>
             </a:r>
           </a:p>
         </p:txBody>
@@ -5887,8 +6624,8 @@
         </p:nvSpPr>
         <p:spPr>
           <a:xfrm>
-            <a:off x="5989320" y="2423160"/>
-            <a:ext cx="5074920" cy="1691640"/>
+            <a:off x="5989320" y="2331720"/>
+            <a:ext cx="5074920" cy="1600200"/>
           </a:xfrm>
           <a:prstGeom prst="roundRect">
             <a:avLst/>
@@ -5926,13 +6663,13 @@
               </a:spcAft>
             </a:pPr>
             <a:r>
-              <a:rPr sz="1200" b="1" dirty="0">
-                <a:solidFill>
-                  <a:srgbClr val="C8852A"/>
-                </a:solidFill>
-                <a:latin typeface="Segoe UI"/>
-              </a:rPr>
-              <a:t>Roadmap</a:t>
+              <a:rPr sz="1050" b="1">
+                <a:solidFill>
+                  <a:srgbClr val="3F8E5B"/>
+                </a:solidFill>
+                <a:latin typeface="Segoe UI"/>
+              </a:rPr>
+              <a:t>Reach</a:t>
             </a:r>
           </a:p>
           <a:p>
@@ -5942,24 +6679,24 @@
               </a:spcAft>
             </a:pPr>
             <a:r>
-              <a:rPr sz="2400" b="1" dirty="0">
+              <a:rPr b="1">
                 <a:solidFill>
                   <a:srgbClr val="6B4F3A"/>
                 </a:solidFill>
                 <a:latin typeface="Segoe UI"/>
               </a:rPr>
-              <a:t>Merit ledger</a:t>
-            </a:r>
-          </a:p>
-          <a:p>
-            <a:r>
-              <a:rPr dirty="0">
+              <a:t>98M online · 137M mobile</a:t>
+            </a:r>
+          </a:p>
+          <a:p>
+            <a:r>
+              <a:rPr sz="1400">
                 <a:solidFill>
                   <a:srgbClr val="6E665B"/>
                 </a:solidFill>
                 <a:latin typeface="Segoe UI"/>
               </a:rPr>
-              <a:t>XP, streaks, and badges accumulate. Never spent. Funders read consistency, not casino engagement.</a:t>
+              <a:t>83.8% internet penetration. ~89% of mobile on 3G/4G/5G. Validates EN/Fil mobile-first, sub-3G design.</a:t>
             </a:r>
           </a:p>
         </p:txBody>
@@ -5972,8 +6709,8 @@
         </p:nvSpPr>
         <p:spPr>
           <a:xfrm>
-            <a:off x="685800" y="4434840"/>
-            <a:ext cx="5074920" cy="1691640"/>
+            <a:off x="685800" y="4160520"/>
+            <a:ext cx="5074920" cy="1600200"/>
           </a:xfrm>
           <a:prstGeom prst="roundRect">
             <a:avLst/>
@@ -6011,13 +6748,13 @@
               </a:spcAft>
             </a:pPr>
             <a:r>
-              <a:rPr sz="1200" b="1" dirty="0">
-                <a:solidFill>
-                  <a:srgbClr val="C8852A"/>
-                </a:solidFill>
-                <a:latin typeface="Segoe UI"/>
-              </a:rPr>
-              <a:t>Roadmap</a:t>
+              <a:rPr sz="1050" b="1">
+                <a:solidFill>
+                  <a:srgbClr val="4B6BF1"/>
+                </a:solidFill>
+                <a:latin typeface="Segoe UI"/>
+              </a:rPr>
+              <a:t>Funding pool</a:t>
             </a:r>
           </a:p>
           <a:p>
@@ -6027,24 +6764,24 @@
               </a:spcAft>
             </a:pPr>
             <a:r>
-              <a:rPr sz="2400" b="1" dirty="0">
+              <a:rPr b="1">
                 <a:solidFill>
                   <a:srgbClr val="6B4F3A"/>
                 </a:solidFill>
                 <a:latin typeface="Segoe UI"/>
               </a:rPr>
-              <a:t>Verifiable credentials</a:t>
-            </a:r>
-          </a:p>
-          <a:p>
-            <a:r>
-              <a:rPr dirty="0">
+              <a:t>~₱16B public TVET spend</a:t>
+            </a:r>
+          </a:p>
+          <a:p>
+            <a:r>
+              <a:rPr sz="1400">
                 <a:solidFill>
                   <a:srgbClr val="6E665B"/>
                 </a:solidFill>
                 <a:latin typeface="Segoe UI"/>
               </a:rPr>
-              <a:t>W3C VC and Open Badges 3.0. Only a hash anchored on Stellar. No personal data on-chain.</a:t>
+              <a:t>TESDA free tech-voc in 2025; only ~250K of 1.37M graduates were scholarship-funded. FY2026 workforce budget ~₱18.4B.</a:t>
             </a:r>
           </a:p>
         </p:txBody>
@@ -6057,8 +6794,8 @@
         </p:nvSpPr>
         <p:spPr>
           <a:xfrm>
-            <a:off x="5989320" y="4434840"/>
-            <a:ext cx="5074920" cy="1691640"/>
+            <a:off x="5989320" y="4160520"/>
+            <a:ext cx="5074920" cy="1600200"/>
           </a:xfrm>
           <a:prstGeom prst="roundRect">
             <a:avLst/>
@@ -6096,13 +6833,13 @@
               </a:spcAft>
             </a:pPr>
             <a:r>
-              <a:rPr sz="1200" b="1" dirty="0">
-                <a:solidFill>
-                  <a:srgbClr val="3F8E5B"/>
-                </a:solidFill>
-                <a:latin typeface="Segoe UI"/>
-              </a:rPr>
-              <a:t>Live</a:t>
+              <a:rPr sz="1050" b="1">
+                <a:solidFill>
+                  <a:srgbClr val="C8852A"/>
+                </a:solidFill>
+                <a:latin typeface="Segoe UI"/>
+              </a:rPr>
+              <a:t>Our wedge</a:t>
             </a:r>
           </a:p>
           <a:p>
@@ -6112,24 +6849,24 @@
               </a:spcAft>
             </a:pPr>
             <a:r>
-              <a:rPr sz="2400" b="1" dirty="0">
+              <a:rPr b="1">
                 <a:solidFill>
                   <a:srgbClr val="6B4F3A"/>
                 </a:solidFill>
                 <a:latin typeface="Segoe UI"/>
               </a:rPr>
-              <a:t>Filipino-first, low-resource</a:t>
-            </a:r>
-          </a:p>
-          <a:p>
-            <a:r>
-              <a:rPr dirty="0">
+              <a:t>90-day pilot beachhead</a:t>
+            </a:r>
+          </a:p>
+          <a:p>
+            <a:r>
+              <a:rPr sz="1400">
                 <a:solidFill>
                   <a:srgbClr val="6E665B"/>
                 </a:solidFill>
                 <a:latin typeface="Segoe UI"/>
               </a:rPr>
-              <a:t>EN and Filipino toggle. Sub-3G performance budget. System fonts. Light theme only.</a:t>
+              <a:t>50 published courses · 500 learners · 1 simulated grant program · 10 extension teachers in partner network.</a:t>
             </a:r>
           </a:p>
         </p:txBody>
@@ -6142,8 +6879,8 @@
         </p:nvSpPr>
         <p:spPr>
           <a:xfrm>
-            <a:off x="548640" y="6446520"/>
-            <a:ext cx="4572000" cy="320040"/>
+            <a:off x="685800" y="5897880"/>
+            <a:ext cx="10835640" cy="411480"/>
           </a:xfrm>
           <a:prstGeom prst="rect">
             <a:avLst/>
@@ -6158,13 +6895,13 @@
           <a:p>
             <a:pPr algn="l"/>
             <a:r>
-              <a:rPr sz="1000" b="0">
+              <a:rPr sz="900" b="0">
                 <a:solidFill>
                   <a:srgbClr val="6E665B"/>
                 </a:solidFill>
                 <a:latin typeface="Segoe UI"/>
               </a:rPr>
-              <a:t>ANISKWELA  ·  Axon Enjin</a:t>
+              <a:t>Sources: PSA LFS 2025 · DA/ATI RSBSA (Senate hearing, Jan 2026) · DataReportal Digital 2026 · TESDA / FY2026 budget briefer</a:t>
             </a:r>
           </a:p>
         </p:txBody>
@@ -6177,8 +6914,8 @@
         </p:nvSpPr>
         <p:spPr>
           <a:xfrm>
-            <a:off x="9601200" y="6446520"/>
-            <a:ext cx="2103120" cy="320040"/>
+            <a:off x="548640" y="6446520"/>
+            <a:ext cx="4572000" cy="320040"/>
           </a:xfrm>
           <a:prstGeom prst="rect">
             <a:avLst/>
@@ -6191,15 +6928,44 @@
           </a:bodyPr>
           <a:lstStyle/>
           <a:p>
+            <a:pPr algn="l"/>
+            <a:r>
+              <a:rPr sz="1000" b="0">
+                <a:solidFill>
+                  <a:srgbClr val="6E665B"/>
+                </a:solidFill>
+                <a:latin typeface="Segoe UI"/>
+              </a:rPr>
+              <a:t>ANISKWELA  ·  Axon Enjin</a:t>
+            </a:r>
+          </a:p>
+        </p:txBody>
+      </p:sp>
+      <p:sp>
+        <p:nvSpPr>
+          <p:cNvPr id="11" name="TextBox 10"/>
+          <p:cNvSpPr txBox="1"/>
+          <p:nvPr/>
+        </p:nvSpPr>
+        <p:spPr>
+          <a:xfrm>
+            <a:off x="9601200" y="6446520"/>
+            <a:ext cx="2103120" cy="320040"/>
+          </a:xfrm>
+          <a:prstGeom prst="rect">
+            <a:avLst/>
+          </a:prstGeom>
+          <a:noFill/>
+        </p:spPr>
+        <p:txBody>
+          <a:bodyPr wrap="square" anchor="t">
+            <a:spAutoFit/>
+          </a:bodyPr>
+          <a:lstStyle/>
+          <a:p>
             <a:pPr algn="r"/>
             <a:r>
-              <a:rPr sz="1000" b="0">
-                <a:solidFill>
-                  <a:srgbClr val="6E665B"/>
-                </a:solidFill>
-                <a:latin typeface="Segoe UI"/>
-              </a:rPr>
-              <a:t>Grant partner deck  ·  3/10</a:t>
+              <a:t>Grant partner deck  ·  3/11</a:t>
             </a:r>
           </a:p>
         </p:txBody>
@@ -6267,7 +7033,7 @@
                 </a:solidFill>
                 <a:latin typeface="Segoe UI"/>
               </a:rPr>
-              <a:t>LEARNER EXPERIENCE</a:t>
+              <a:t>THE SOLUTION</a:t>
             </a:r>
           </a:p>
         </p:txBody>
@@ -6281,7 +7047,7 @@
         <p:spPr>
           <a:xfrm>
             <a:off x="685800" y="868680"/>
-            <a:ext cx="10515600" cy="584775"/>
+            <a:ext cx="10515600" cy="822960"/>
           </a:xfrm>
           <a:prstGeom prst="rect">
             <a:avLst/>
@@ -6296,13 +7062,13 @@
           <a:p>
             <a:pPr algn="l"/>
             <a:r>
-              <a:rPr sz="3200" b="1" dirty="0">
+              <a:rPr sz="3200" b="1">
                 <a:solidFill>
                   <a:srgbClr val="6B4F3A"/>
                 </a:solidFill>
                 <a:latin typeface="Segoe UI"/>
               </a:rPr>
-              <a:t>Built for the phone</a:t>
+              <a:t>Aniskwela: harvest school for Filipino farmers.</a:t>
             </a:r>
           </a:p>
         </p:txBody>
@@ -6316,7 +7082,7 @@
         <p:spPr>
           <a:xfrm>
             <a:off x="685800" y="1600200"/>
-            <a:ext cx="10515600" cy="640080"/>
+            <a:ext cx="10515600" cy="338554"/>
           </a:xfrm>
           <a:prstGeom prst="rect">
             <a:avLst/>
@@ -6331,13 +7097,13 @@
           <a:p>
             <a:pPr algn="l"/>
             <a:r>
-              <a:rPr sz="1700" b="0">
+              <a:rPr sz="1600" b="0" dirty="0">
                 <a:solidFill>
                   <a:srgbClr val="6E665B"/>
                 </a:solidFill>
                 <a:latin typeface="Segoe UI"/>
               </a:rPr>
-              <a:t>Mobile-first catalog and lessons. English and Filipino. Cached reads with no AI on the learner path.</a:t>
+              <a:t>A content-agnostic learning engine, positioned farmer-first, with open credentials and a funder-ready merit ledger.</a:t>
             </a:r>
           </a:p>
         </p:txBody>
@@ -6350,8 +7116,8 @@
         </p:nvSpPr>
         <p:spPr>
           <a:xfrm>
-            <a:off x="685800" y="2331720"/>
-            <a:ext cx="3291840" cy="3840480"/>
+            <a:off x="685800" y="2423160"/>
+            <a:ext cx="5074920" cy="1691640"/>
           </a:xfrm>
           <a:prstGeom prst="roundRect">
             <a:avLst/>
@@ -6359,9 +7125,9 @@
           <a:solidFill>
             <a:srgbClr val="FFFFFF"/>
           </a:solidFill>
-          <a:ln w="25400">
+          <a:ln w="12700">
             <a:solidFill>
-              <a:srgbClr val="4B6BF1"/>
+              <a:srgbClr val="E7E0D3"/>
             </a:solidFill>
           </a:ln>
         </p:spPr>
@@ -6380,108 +7146,63 @@
           </a:fontRef>
         </p:style>
         <p:txBody>
-          <a:bodyPr rtlCol="0" anchor="ctr"/>
-          <a:lstStyle/>
-          <a:p>
-            <a:pPr algn="ctr"/>
-            <a:endParaRPr sz="3200"/>
-          </a:p>
-        </p:txBody>
-      </p:sp>
-      <p:sp>
-        <p:nvSpPr>
-          <p:cNvPr id="6" name="TextBox 5"/>
-          <p:cNvSpPr txBox="1"/>
-          <p:nvPr/>
-        </p:nvSpPr>
-        <p:spPr>
-          <a:xfrm>
-            <a:off x="914400" y="2606040"/>
-            <a:ext cx="2834640" cy="400110"/>
-          </a:xfrm>
-          <a:prstGeom prst="rect">
-            <a:avLst/>
-          </a:prstGeom>
-          <a:noFill/>
-        </p:spPr>
-        <p:txBody>
-          <a:bodyPr wrap="square" anchor="t">
-            <a:spAutoFit/>
-          </a:bodyPr>
-          <a:lstStyle/>
-          <a:p>
-            <a:pPr algn="l"/>
-            <a:r>
-              <a:rPr sz="2000" b="1">
+          <a:bodyPr wrap="square" lIns="137160" tIns="109728" rIns="137160" bIns="91440" rtlCol="0" anchor="ctr"/>
+          <a:lstStyle/>
+          <a:p>
+            <a:pPr>
+              <a:spcAft>
+                <a:spcPts val="400"/>
+              </a:spcAft>
+            </a:pPr>
+            <a:r>
+              <a:rPr sz="1200" b="1" dirty="0">
+                <a:solidFill>
+                  <a:srgbClr val="3F8E5B"/>
+                </a:solidFill>
+                <a:latin typeface="Segoe UI"/>
+              </a:rPr>
+              <a:t>Live</a:t>
+            </a:r>
+          </a:p>
+          <a:p>
+            <a:pPr>
+              <a:spcAft>
+                <a:spcPts val="600"/>
+              </a:spcAft>
+            </a:pPr>
+            <a:r>
+              <a:rPr sz="2400" b="1" dirty="0">
                 <a:solidFill>
                   <a:srgbClr val="6B4F3A"/>
                 </a:solidFill>
                 <a:latin typeface="Segoe UI"/>
               </a:rPr>
-              <a:t>Course catalog</a:t>
-            </a:r>
-          </a:p>
-        </p:txBody>
-      </p:sp>
-      <p:sp>
-        <p:nvSpPr>
-          <p:cNvPr id="7" name="TextBox 6"/>
-          <p:cNvSpPr txBox="1"/>
-          <p:nvPr/>
-        </p:nvSpPr>
-        <p:spPr>
-          <a:xfrm>
-            <a:off x="914400" y="3063240"/>
-            <a:ext cx="2834640" cy="2339102"/>
-          </a:xfrm>
-          <a:prstGeom prst="rect">
-            <a:avLst/>
-          </a:prstGeom>
-          <a:noFill/>
-        </p:spPr>
-        <p:txBody>
-          <a:bodyPr wrap="square" anchor="t">
-            <a:spAutoFit/>
-          </a:bodyPr>
-          <a:lstStyle/>
-          <a:p>
-            <a:pPr algn="l"/>
-            <a:r>
-              <a:rPr b="0">
+              <a:t>AI course generation</a:t>
+            </a:r>
+          </a:p>
+          <a:p>
+            <a:r>
+              <a:rPr dirty="0">
                 <a:solidFill>
                   <a:srgbClr val="6E665B"/>
                 </a:solidFill>
                 <a:latin typeface="Segoe UI"/>
               </a:rPr>
-              <a:t>Organic Rice Basics</a:t>
-            </a:r>
-            <a:br>
-              <a:rPr sz="3200"/>
-            </a:br>
-            <a:r>
-              <a:rPr sz="3200"/>
-              <a:t>Financial Literacy 101</a:t>
-            </a:r>
-            <a:br>
-              <a:rPr sz="3200"/>
-            </a:br>
-            <a:r>
-              <a:rPr sz="3200"/>
-              <a:t>Soil Health Module</a:t>
-            </a:r>
-          </a:p>
-        </p:txBody>
-      </p:sp>
-      <p:sp>
-        <p:nvSpPr>
-          <p:cNvPr id="9" name="Rounded Rectangle 8"/>
+              <a:t>Teachers upload a PDF. Azure AI Foundry drafts modules and quizzes. Human review before publish.</a:t>
+            </a:r>
+          </a:p>
+        </p:txBody>
+      </p:sp>
+      <p:sp>
+        <p:nvSpPr>
+          <p:cNvPr id="6" name="Rounded Rectangle 5"/>
           <p:cNvSpPr/>
           <p:nvPr/>
         </p:nvSpPr>
         <p:spPr>
           <a:xfrm>
-            <a:off x="4251960" y="2331720"/>
-            <a:ext cx="3291840" cy="3840480"/>
+            <a:off x="5989320" y="2423160"/>
+            <a:ext cx="5074920" cy="1691640"/>
           </a:xfrm>
           <a:prstGeom prst="roundRect">
             <a:avLst/>
@@ -6489,9 +7210,9 @@
           <a:solidFill>
             <a:srgbClr val="FFFFFF"/>
           </a:solidFill>
-          <a:ln w="25400">
+          <a:ln w="12700">
             <a:solidFill>
-              <a:srgbClr val="4B6BF1"/>
+              <a:srgbClr val="E7E0D3"/>
             </a:solidFill>
           </a:ln>
         </p:spPr>
@@ -6510,11 +7231,255 @@
           </a:fontRef>
         </p:style>
         <p:txBody>
-          <a:bodyPr rtlCol="0" anchor="ctr"/>
-          <a:lstStyle/>
-          <a:p>
-            <a:pPr algn="ctr"/>
-            <a:endParaRPr sz="3200"/>
+          <a:bodyPr wrap="square" lIns="137160" tIns="109728" rIns="137160" bIns="91440" rtlCol="0" anchor="ctr"/>
+          <a:lstStyle/>
+          <a:p>
+            <a:pPr>
+              <a:spcAft>
+                <a:spcPts val="400"/>
+              </a:spcAft>
+            </a:pPr>
+            <a:r>
+              <a:rPr sz="1200" b="1" dirty="0">
+                <a:solidFill>
+                  <a:srgbClr val="C8852A"/>
+                </a:solidFill>
+                <a:latin typeface="Segoe UI"/>
+              </a:rPr>
+              <a:t>Roadmap</a:t>
+            </a:r>
+          </a:p>
+          <a:p>
+            <a:pPr>
+              <a:spcAft>
+                <a:spcPts val="600"/>
+              </a:spcAft>
+            </a:pPr>
+            <a:r>
+              <a:rPr sz="2400" b="1" dirty="0">
+                <a:solidFill>
+                  <a:srgbClr val="6B4F3A"/>
+                </a:solidFill>
+                <a:latin typeface="Segoe UI"/>
+              </a:rPr>
+              <a:t>Merit ledger</a:t>
+            </a:r>
+          </a:p>
+          <a:p>
+            <a:r>
+              <a:rPr dirty="0">
+                <a:solidFill>
+                  <a:srgbClr val="6E665B"/>
+                </a:solidFill>
+                <a:latin typeface="Segoe UI"/>
+              </a:rPr>
+              <a:t>XP, streaks, and badges accumulate. Never spent. Funders read consistency, not casino engagement.</a:t>
+            </a:r>
+          </a:p>
+        </p:txBody>
+      </p:sp>
+      <p:sp>
+        <p:nvSpPr>
+          <p:cNvPr id="7" name="Rounded Rectangle 6"/>
+          <p:cNvSpPr/>
+          <p:nvPr/>
+        </p:nvSpPr>
+        <p:spPr>
+          <a:xfrm>
+            <a:off x="685800" y="4434840"/>
+            <a:ext cx="5074920" cy="1691640"/>
+          </a:xfrm>
+          <a:prstGeom prst="roundRect">
+            <a:avLst/>
+          </a:prstGeom>
+          <a:solidFill>
+            <a:srgbClr val="FFFFFF"/>
+          </a:solidFill>
+          <a:ln w="12700">
+            <a:solidFill>
+              <a:srgbClr val="E7E0D3"/>
+            </a:solidFill>
+          </a:ln>
+        </p:spPr>
+        <p:style>
+          <a:lnRef idx="1">
+            <a:schemeClr val="accent1"/>
+          </a:lnRef>
+          <a:fillRef idx="3">
+            <a:schemeClr val="accent1"/>
+          </a:fillRef>
+          <a:effectRef idx="2">
+            <a:schemeClr val="accent1"/>
+          </a:effectRef>
+          <a:fontRef idx="minor">
+            <a:schemeClr val="lt1"/>
+          </a:fontRef>
+        </p:style>
+        <p:txBody>
+          <a:bodyPr wrap="square" lIns="137160" tIns="109728" rIns="137160" bIns="91440" rtlCol="0" anchor="ctr"/>
+          <a:lstStyle/>
+          <a:p>
+            <a:pPr>
+              <a:spcAft>
+                <a:spcPts val="400"/>
+              </a:spcAft>
+            </a:pPr>
+            <a:r>
+              <a:rPr sz="1200" b="1" dirty="0">
+                <a:solidFill>
+                  <a:srgbClr val="C8852A"/>
+                </a:solidFill>
+                <a:latin typeface="Segoe UI"/>
+              </a:rPr>
+              <a:t>Roadmap</a:t>
+            </a:r>
+          </a:p>
+          <a:p>
+            <a:pPr>
+              <a:spcAft>
+                <a:spcPts val="600"/>
+              </a:spcAft>
+            </a:pPr>
+            <a:r>
+              <a:rPr sz="2400" b="1" dirty="0">
+                <a:solidFill>
+                  <a:srgbClr val="6B4F3A"/>
+                </a:solidFill>
+                <a:latin typeface="Segoe UI"/>
+              </a:rPr>
+              <a:t>Verifiable credentials</a:t>
+            </a:r>
+          </a:p>
+          <a:p>
+            <a:r>
+              <a:rPr dirty="0">
+                <a:solidFill>
+                  <a:srgbClr val="6E665B"/>
+                </a:solidFill>
+                <a:latin typeface="Segoe UI"/>
+              </a:rPr>
+              <a:t>W3C VC and Open Badges 3.0. Only a hash anchored on Stellar. No personal data on-chain.</a:t>
+            </a:r>
+          </a:p>
+        </p:txBody>
+      </p:sp>
+      <p:sp>
+        <p:nvSpPr>
+          <p:cNvPr id="8" name="Rounded Rectangle 7"/>
+          <p:cNvSpPr/>
+          <p:nvPr/>
+        </p:nvSpPr>
+        <p:spPr>
+          <a:xfrm>
+            <a:off x="5989320" y="4434840"/>
+            <a:ext cx="5074920" cy="1691640"/>
+          </a:xfrm>
+          <a:prstGeom prst="roundRect">
+            <a:avLst/>
+          </a:prstGeom>
+          <a:solidFill>
+            <a:srgbClr val="FFFFFF"/>
+          </a:solidFill>
+          <a:ln w="12700">
+            <a:solidFill>
+              <a:srgbClr val="E7E0D3"/>
+            </a:solidFill>
+          </a:ln>
+        </p:spPr>
+        <p:style>
+          <a:lnRef idx="1">
+            <a:schemeClr val="accent1"/>
+          </a:lnRef>
+          <a:fillRef idx="3">
+            <a:schemeClr val="accent1"/>
+          </a:fillRef>
+          <a:effectRef idx="2">
+            <a:schemeClr val="accent1"/>
+          </a:effectRef>
+          <a:fontRef idx="minor">
+            <a:schemeClr val="lt1"/>
+          </a:fontRef>
+        </p:style>
+        <p:txBody>
+          <a:bodyPr wrap="square" lIns="137160" tIns="109728" rIns="137160" bIns="91440" rtlCol="0" anchor="ctr"/>
+          <a:lstStyle/>
+          <a:p>
+            <a:pPr>
+              <a:spcAft>
+                <a:spcPts val="400"/>
+              </a:spcAft>
+            </a:pPr>
+            <a:r>
+              <a:rPr sz="1200" b="1" dirty="0">
+                <a:solidFill>
+                  <a:srgbClr val="3F8E5B"/>
+                </a:solidFill>
+                <a:latin typeface="Segoe UI"/>
+              </a:rPr>
+              <a:t>Live</a:t>
+            </a:r>
+          </a:p>
+          <a:p>
+            <a:pPr>
+              <a:spcAft>
+                <a:spcPts val="600"/>
+              </a:spcAft>
+            </a:pPr>
+            <a:r>
+              <a:rPr sz="2400" b="1" dirty="0">
+                <a:solidFill>
+                  <a:srgbClr val="6B4F3A"/>
+                </a:solidFill>
+                <a:latin typeface="Segoe UI"/>
+              </a:rPr>
+              <a:t>Filipino-first, low-resource</a:t>
+            </a:r>
+          </a:p>
+          <a:p>
+            <a:r>
+              <a:rPr dirty="0">
+                <a:solidFill>
+                  <a:srgbClr val="6E665B"/>
+                </a:solidFill>
+                <a:latin typeface="Segoe UI"/>
+              </a:rPr>
+              <a:t>EN and Filipino toggle. Sub-3G performance budget. System fonts. Light theme only.</a:t>
+            </a:r>
+          </a:p>
+        </p:txBody>
+      </p:sp>
+      <p:sp>
+        <p:nvSpPr>
+          <p:cNvPr id="9" name="TextBox 8"/>
+          <p:cNvSpPr txBox="1"/>
+          <p:nvPr/>
+        </p:nvSpPr>
+        <p:spPr>
+          <a:xfrm>
+            <a:off x="548640" y="6446520"/>
+            <a:ext cx="4572000" cy="320040"/>
+          </a:xfrm>
+          <a:prstGeom prst="rect">
+            <a:avLst/>
+          </a:prstGeom>
+          <a:noFill/>
+        </p:spPr>
+        <p:txBody>
+          <a:bodyPr wrap="square" anchor="t">
+            <a:spAutoFit/>
+          </a:bodyPr>
+          <a:lstStyle/>
+          <a:p>
+            <a:pPr algn="l"/>
+            <a:r>
+              <a:rPr sz="1000" b="0">
+                <a:solidFill>
+                  <a:srgbClr val="6E665B"/>
+                </a:solidFill>
+                <a:latin typeface="Segoe UI"/>
+              </a:rPr>
+              <a:t>ANISKWELA  ·  Axon Enjin</a:t>
+            </a:r>
           </a:p>
         </p:txBody>
       </p:sp>
@@ -6526,8 +7491,8 @@
         </p:nvSpPr>
         <p:spPr>
           <a:xfrm>
-            <a:off x="4480560" y="2606040"/>
-            <a:ext cx="2834640" cy="400110"/>
+            <a:off x="9601200" y="6446520"/>
+            <a:ext cx="2103120" cy="320040"/>
           </a:xfrm>
           <a:prstGeom prst="rect">
             <a:avLst/>
@@ -6540,256 +7505,9 @@
           </a:bodyPr>
           <a:lstStyle/>
           <a:p>
-            <a:pPr algn="l"/>
-            <a:r>
-              <a:rPr sz="2000" b="1">
-                <a:solidFill>
-                  <a:srgbClr val="6B4F3A"/>
-                </a:solidFill>
-                <a:latin typeface="Segoe UI"/>
-              </a:rPr>
-              <a:t>Lesson reader</a:t>
-            </a:r>
-          </a:p>
-        </p:txBody>
-      </p:sp>
-      <p:sp>
-        <p:nvSpPr>
-          <p:cNvPr id="11" name="TextBox 10"/>
-          <p:cNvSpPr txBox="1"/>
-          <p:nvPr/>
-        </p:nvSpPr>
-        <p:spPr>
-          <a:xfrm>
-            <a:off x="4480560" y="3063240"/>
-            <a:ext cx="2834640" cy="2831544"/>
-          </a:xfrm>
-          <a:prstGeom prst="rect">
-            <a:avLst/>
-          </a:prstGeom>
-          <a:noFill/>
-        </p:spPr>
-        <p:txBody>
-          <a:bodyPr wrap="square" anchor="t">
-            <a:spAutoFit/>
-          </a:bodyPr>
-          <a:lstStyle/>
-          <a:p>
-            <a:pPr algn="l"/>
-            <a:r>
-              <a:rPr b="0">
-                <a:solidFill>
-                  <a:srgbClr val="6E665B"/>
-                </a:solidFill>
-                <a:latin typeface="Segoe UI"/>
-              </a:rPr>
-              <a:t>Short chunks for 3G.</a:t>
-            </a:r>
-            <a:br>
-              <a:rPr sz="3200"/>
-            </a:br>
-            <a:r>
-              <a:rPr sz="3200"/>
-              <a:t>Readable body text.</a:t>
-            </a:r>
-            <a:br>
-              <a:rPr sz="3200"/>
-            </a:br>
-            <a:r>
-              <a:rPr sz="3200"/>
-              <a:t>Filipino / English toggle in header.</a:t>
-            </a:r>
-          </a:p>
-        </p:txBody>
-      </p:sp>
-      <p:sp>
-        <p:nvSpPr>
-          <p:cNvPr id="13" name="TextBox 12"/>
-          <p:cNvSpPr txBox="1"/>
-          <p:nvPr/>
-        </p:nvSpPr>
-        <p:spPr>
-          <a:xfrm>
-            <a:off x="7818120" y="2514600"/>
-            <a:ext cx="3703320" cy="2759730"/>
-          </a:xfrm>
-          <a:prstGeom prst="rect">
-            <a:avLst/>
-          </a:prstGeom>
-          <a:noFill/>
-        </p:spPr>
-        <p:txBody>
-          <a:bodyPr wrap="square">
-            <a:spAutoFit/>
-          </a:bodyPr>
-          <a:lstStyle/>
-          <a:p>
-            <a:pPr>
-              <a:spcAft>
-                <a:spcPts val="800"/>
-              </a:spcAft>
-            </a:pPr>
-            <a:r>
-              <a:rPr sz="2000" dirty="0">
-                <a:solidFill>
-                  <a:srgbClr val="241F1A"/>
-                </a:solidFill>
-                <a:latin typeface="Segoe UI"/>
-              </a:rPr>
-              <a:t>≈174 KB </a:t>
-            </a:r>
-            <a:r>
-              <a:rPr sz="2000" dirty="0" err="1">
-                <a:solidFill>
-                  <a:srgbClr val="241F1A"/>
-                </a:solidFill>
-                <a:latin typeface="Segoe UI"/>
-              </a:rPr>
-              <a:t>gz</a:t>
-            </a:r>
-            <a:r>
-              <a:rPr sz="2000" dirty="0">
-                <a:solidFill>
-                  <a:srgbClr val="241F1A"/>
-                </a:solidFill>
-                <a:latin typeface="Segoe UI"/>
-              </a:rPr>
-              <a:t> shared JS</a:t>
-            </a:r>
-            <a:br>
-              <a:rPr lang="en-US" sz="2000" dirty="0">
-                <a:solidFill>
-                  <a:srgbClr val="241F1A"/>
-                </a:solidFill>
-                <a:latin typeface="Segoe UI"/>
-              </a:rPr>
-            </a:br>
-            <a:r>
-              <a:rPr sz="2000" dirty="0">
-                <a:solidFill>
-                  <a:srgbClr val="241F1A"/>
-                </a:solidFill>
-                <a:latin typeface="Segoe UI"/>
-              </a:rPr>
-              <a:t>(budget: 220 KB)</a:t>
-            </a:r>
-          </a:p>
-          <a:p>
-            <a:pPr>
-              <a:spcAft>
-                <a:spcPts val="800"/>
-              </a:spcAft>
-            </a:pPr>
-            <a:br>
-              <a:rPr lang="en-US" sz="2000" dirty="0">
-                <a:solidFill>
-                  <a:srgbClr val="241F1A"/>
-                </a:solidFill>
-                <a:latin typeface="Segoe UI"/>
-              </a:rPr>
-            </a:br>
-            <a:r>
-              <a:rPr sz="2000" dirty="0">
-                <a:solidFill>
-                  <a:srgbClr val="241F1A"/>
-                </a:solidFill>
-                <a:latin typeface="Segoe UI"/>
-              </a:rPr>
-              <a:t>Seed → Sprout → Scholar → Expert → Mentor levels</a:t>
-            </a:r>
-          </a:p>
-          <a:p>
-            <a:pPr>
-              <a:spcAft>
-                <a:spcPts val="800"/>
-              </a:spcAft>
-            </a:pPr>
-            <a:br>
-              <a:rPr lang="en-US" sz="2000" dirty="0">
-                <a:solidFill>
-                  <a:srgbClr val="241F1A"/>
-                </a:solidFill>
-                <a:latin typeface="Segoe UI"/>
-              </a:rPr>
-            </a:br>
-            <a:r>
-              <a:rPr sz="2000" dirty="0">
-                <a:solidFill>
-                  <a:srgbClr val="241F1A"/>
-                </a:solidFill>
-                <a:latin typeface="Segoe UI"/>
-              </a:rPr>
-              <a:t>Roadmap: quizzes, XP bar, credential wallet</a:t>
-            </a:r>
-          </a:p>
-        </p:txBody>
-      </p:sp>
-      <p:sp>
-        <p:nvSpPr>
-          <p:cNvPr id="14" name="TextBox 13"/>
-          <p:cNvSpPr txBox="1"/>
-          <p:nvPr/>
-        </p:nvSpPr>
-        <p:spPr>
-          <a:xfrm>
-            <a:off x="548640" y="6446520"/>
-            <a:ext cx="4572000" cy="320040"/>
-          </a:xfrm>
-          <a:prstGeom prst="rect">
-            <a:avLst/>
-          </a:prstGeom>
-          <a:noFill/>
-        </p:spPr>
-        <p:txBody>
-          <a:bodyPr wrap="square" anchor="t">
-            <a:spAutoFit/>
-          </a:bodyPr>
-          <a:lstStyle/>
-          <a:p>
-            <a:pPr algn="l"/>
-            <a:r>
-              <a:rPr sz="1000" b="0">
-                <a:solidFill>
-                  <a:srgbClr val="6E665B"/>
-                </a:solidFill>
-                <a:latin typeface="Segoe UI"/>
-              </a:rPr>
-              <a:t>ANISKWELA  ·  Axon Enjin</a:t>
-            </a:r>
-          </a:p>
-        </p:txBody>
-      </p:sp>
-      <p:sp>
-        <p:nvSpPr>
-          <p:cNvPr id="15" name="TextBox 14"/>
-          <p:cNvSpPr txBox="1"/>
-          <p:nvPr/>
-        </p:nvSpPr>
-        <p:spPr>
-          <a:xfrm>
-            <a:off x="9601200" y="6446520"/>
-            <a:ext cx="2103120" cy="320040"/>
-          </a:xfrm>
-          <a:prstGeom prst="rect">
-            <a:avLst/>
-          </a:prstGeom>
-          <a:noFill/>
-        </p:spPr>
-        <p:txBody>
-          <a:bodyPr wrap="square" anchor="t">
-            <a:spAutoFit/>
-          </a:bodyPr>
-          <a:lstStyle/>
-          <a:p>
             <a:pPr algn="r"/>
             <a:r>
-              <a:rPr sz="1000" b="0">
-                <a:solidFill>
-                  <a:srgbClr val="6E665B"/>
-                </a:solidFill>
-                <a:latin typeface="Segoe UI"/>
-              </a:rPr>
-              <a:t>Grant partner deck  ·  4/10</a:t>
+              <a:t>Grant partner deck  ·  4/11</a:t>
             </a:r>
           </a:p>
         </p:txBody>
@@ -6829,6 +7547,41 @@
       </p:grpSpPr>
       <p:sp>
         <p:nvSpPr>
+          <p:cNvPr id="2" name="TextBox 1"/>
+          <p:cNvSpPr txBox="1"/>
+          <p:nvPr/>
+        </p:nvSpPr>
+        <p:spPr>
+          <a:xfrm>
+            <a:off x="685800" y="502920"/>
+            <a:ext cx="3657600" cy="320040"/>
+          </a:xfrm>
+          <a:prstGeom prst="rect">
+            <a:avLst/>
+          </a:prstGeom>
+          <a:noFill/>
+        </p:spPr>
+        <p:txBody>
+          <a:bodyPr wrap="square" anchor="t">
+            <a:spAutoFit/>
+          </a:bodyPr>
+          <a:lstStyle/>
+          <a:p>
+            <a:pPr algn="l"/>
+            <a:r>
+              <a:rPr sz="1100" b="1">
+                <a:solidFill>
+                  <a:srgbClr val="3F8E5B"/>
+                </a:solidFill>
+                <a:latin typeface="Segoe UI"/>
+              </a:rPr>
+              <a:t>LEARNER EXPERIENCE</a:t>
+            </a:r>
+          </a:p>
+        </p:txBody>
+      </p:sp>
+      <p:sp>
+        <p:nvSpPr>
           <p:cNvPr id="3" name="TextBox 2"/>
           <p:cNvSpPr txBox="1"/>
           <p:nvPr/>
@@ -6836,7 +7589,7 @@
         <p:spPr>
           <a:xfrm>
             <a:off x="685800" y="868680"/>
-            <a:ext cx="10515600" cy="1077218"/>
+            <a:ext cx="10515600" cy="584775"/>
           </a:xfrm>
           <a:prstGeom prst="rect">
             <a:avLst/>
@@ -6857,24 +7610,7 @@
                 </a:solidFill>
                 <a:latin typeface="Segoe UI"/>
               </a:rPr>
-              <a:t>Teachers publish in an afternoon.</a:t>
-            </a:r>
-            <a:br>
-              <a:rPr lang="en-US" sz="3200" b="1" dirty="0">
-                <a:solidFill>
-                  <a:srgbClr val="6B4F3A"/>
-                </a:solidFill>
-                <a:latin typeface="Segoe UI"/>
-              </a:rPr>
-            </a:br>
-            <a:r>
-              <a:rPr sz="3200" b="1" dirty="0">
-                <a:solidFill>
-                  <a:srgbClr val="6B4F3A"/>
-                </a:solidFill>
-                <a:latin typeface="Segoe UI"/>
-              </a:rPr>
-              <a:t>Funders get criteria they can audit.</a:t>
+              <a:t>Built for the phone</a:t>
             </a:r>
           </a:p>
         </p:txBody>
@@ -6887,7 +7623,7 @@
         </p:nvSpPr>
         <p:spPr>
           <a:xfrm>
-            <a:off x="685800" y="1991618"/>
+            <a:off x="685800" y="1600200"/>
             <a:ext cx="10515600" cy="640080"/>
           </a:xfrm>
           <a:prstGeom prst="rect">
@@ -6909,7 +7645,88 @@
                 </a:solidFill>
                 <a:latin typeface="Segoe UI"/>
               </a:rPr>
-              <a:t>Upload and generate is live today. The funder eligibility console is specified and schema-ready.</a:t>
+              <a:t>Mobile-first catalog and lessons. English and Filipino. Cached reads with no AI on the learner path.</a:t>
+            </a:r>
+          </a:p>
+        </p:txBody>
+      </p:sp>
+      <p:sp>
+        <p:nvSpPr>
+          <p:cNvPr id="5" name="Rounded Rectangle 4"/>
+          <p:cNvSpPr/>
+          <p:nvPr/>
+        </p:nvSpPr>
+        <p:spPr>
+          <a:xfrm>
+            <a:off x="685800" y="2331720"/>
+            <a:ext cx="3291840" cy="3840480"/>
+          </a:xfrm>
+          <a:prstGeom prst="roundRect">
+            <a:avLst/>
+          </a:prstGeom>
+          <a:solidFill>
+            <a:srgbClr val="FFFFFF"/>
+          </a:solidFill>
+          <a:ln w="25400">
+            <a:solidFill>
+              <a:srgbClr val="4B6BF1"/>
+            </a:solidFill>
+          </a:ln>
+        </p:spPr>
+        <p:style>
+          <a:lnRef idx="1">
+            <a:schemeClr val="accent1"/>
+          </a:lnRef>
+          <a:fillRef idx="3">
+            <a:schemeClr val="accent1"/>
+          </a:fillRef>
+          <a:effectRef idx="2">
+            <a:schemeClr val="accent1"/>
+          </a:effectRef>
+          <a:fontRef idx="minor">
+            <a:schemeClr val="lt1"/>
+          </a:fontRef>
+        </p:style>
+        <p:txBody>
+          <a:bodyPr rtlCol="0" anchor="ctr"/>
+          <a:lstStyle/>
+          <a:p>
+            <a:pPr algn="ctr"/>
+            <a:endParaRPr sz="3200"/>
+          </a:p>
+        </p:txBody>
+      </p:sp>
+      <p:sp>
+        <p:nvSpPr>
+          <p:cNvPr id="6" name="TextBox 5"/>
+          <p:cNvSpPr txBox="1"/>
+          <p:nvPr/>
+        </p:nvSpPr>
+        <p:spPr>
+          <a:xfrm>
+            <a:off x="914400" y="2606040"/>
+            <a:ext cx="2834640" cy="400110"/>
+          </a:xfrm>
+          <a:prstGeom prst="rect">
+            <a:avLst/>
+          </a:prstGeom>
+          <a:noFill/>
+        </p:spPr>
+        <p:txBody>
+          <a:bodyPr wrap="square" anchor="t">
+            <a:spAutoFit/>
+          </a:bodyPr>
+          <a:lstStyle/>
+          <a:p>
+            <a:pPr algn="l"/>
+            <a:r>
+              <a:rPr sz="2000" b="1">
+                <a:solidFill>
+                  <a:srgbClr val="6B4F3A"/>
+                </a:solidFill>
+                <a:latin typeface="Segoe UI"/>
+              </a:rPr>
+              <a:t>Course catalog</a:t>
             </a:r>
           </a:p>
         </p:txBody>
@@ -6922,8 +7739,8 @@
         </p:nvSpPr>
         <p:spPr>
           <a:xfrm>
-            <a:off x="548640" y="6446520"/>
-            <a:ext cx="4572000" cy="320040"/>
+            <a:off x="914400" y="3063240"/>
+            <a:ext cx="2834640" cy="2339102"/>
           </a:xfrm>
           <a:prstGeom prst="rect">
             <a:avLst/>
@@ -6938,27 +7755,87 @@
           <a:p>
             <a:pPr algn="l"/>
             <a:r>
-              <a:rPr sz="1000" b="0">
+              <a:rPr b="0">
                 <a:solidFill>
                   <a:srgbClr val="6E665B"/>
                 </a:solidFill>
                 <a:latin typeface="Segoe UI"/>
               </a:rPr>
-              <a:t>ANISKWELA  ·  Axon Enjin</a:t>
-            </a:r>
-          </a:p>
-        </p:txBody>
-      </p:sp>
-      <p:sp>
-        <p:nvSpPr>
-          <p:cNvPr id="8" name="TextBox 7"/>
+              <a:t>Organic Rice Basics</a:t>
+            </a:r>
+            <a:br>
+              <a:rPr sz="3200"/>
+            </a:br>
+            <a:r>
+              <a:rPr sz="3200"/>
+              <a:t>Financial Literacy 101</a:t>
+            </a:r>
+            <a:br>
+              <a:rPr sz="3200"/>
+            </a:br>
+            <a:r>
+              <a:rPr sz="3200"/>
+              <a:t>Soil Health Module</a:t>
+            </a:r>
+          </a:p>
+        </p:txBody>
+      </p:sp>
+      <p:sp>
+        <p:nvSpPr>
+          <p:cNvPr id="9" name="Rounded Rectangle 8"/>
+          <p:cNvSpPr/>
+          <p:nvPr/>
+        </p:nvSpPr>
+        <p:spPr>
+          <a:xfrm>
+            <a:off x="4251960" y="2331720"/>
+            <a:ext cx="3291840" cy="3840480"/>
+          </a:xfrm>
+          <a:prstGeom prst="roundRect">
+            <a:avLst/>
+          </a:prstGeom>
+          <a:solidFill>
+            <a:srgbClr val="FFFFFF"/>
+          </a:solidFill>
+          <a:ln w="25400">
+            <a:solidFill>
+              <a:srgbClr val="4B6BF1"/>
+            </a:solidFill>
+          </a:ln>
+        </p:spPr>
+        <p:style>
+          <a:lnRef idx="1">
+            <a:schemeClr val="accent1"/>
+          </a:lnRef>
+          <a:fillRef idx="3">
+            <a:schemeClr val="accent1"/>
+          </a:fillRef>
+          <a:effectRef idx="2">
+            <a:schemeClr val="accent1"/>
+          </a:effectRef>
+          <a:fontRef idx="minor">
+            <a:schemeClr val="lt1"/>
+          </a:fontRef>
+        </p:style>
+        <p:txBody>
+          <a:bodyPr rtlCol="0" anchor="ctr"/>
+          <a:lstStyle/>
+          <a:p>
+            <a:pPr algn="ctr"/>
+            <a:endParaRPr sz="3200"/>
+          </a:p>
+        </p:txBody>
+      </p:sp>
+      <p:sp>
+        <p:nvSpPr>
+          <p:cNvPr id="10" name="TextBox 9"/>
           <p:cNvSpPr txBox="1"/>
           <p:nvPr/>
         </p:nvSpPr>
         <p:spPr>
           <a:xfrm>
-            <a:off x="9601200" y="6446520"/>
-            <a:ext cx="2103120" cy="320040"/>
+            <a:off x="4480560" y="2606040"/>
+            <a:ext cx="2834640" cy="400110"/>
           </a:xfrm>
           <a:prstGeom prst="rect">
             <a:avLst/>
@@ -6971,49 +7848,254 @@
           </a:bodyPr>
           <a:lstStyle/>
           <a:p>
+            <a:pPr algn="l"/>
+            <a:r>
+              <a:rPr sz="2000" b="1">
+                <a:solidFill>
+                  <a:srgbClr val="6B4F3A"/>
+                </a:solidFill>
+                <a:latin typeface="Segoe UI"/>
+              </a:rPr>
+              <a:t>Lesson reader</a:t>
+            </a:r>
+          </a:p>
+        </p:txBody>
+      </p:sp>
+      <p:sp>
+        <p:nvSpPr>
+          <p:cNvPr id="11" name="TextBox 10"/>
+          <p:cNvSpPr txBox="1"/>
+          <p:nvPr/>
+        </p:nvSpPr>
+        <p:spPr>
+          <a:xfrm>
+            <a:off x="4480560" y="3063240"/>
+            <a:ext cx="2834640" cy="2831544"/>
+          </a:xfrm>
+          <a:prstGeom prst="rect">
+            <a:avLst/>
+          </a:prstGeom>
+          <a:noFill/>
+        </p:spPr>
+        <p:txBody>
+          <a:bodyPr wrap="square" anchor="t">
+            <a:spAutoFit/>
+          </a:bodyPr>
+          <a:lstStyle/>
+          <a:p>
+            <a:pPr algn="l"/>
+            <a:r>
+              <a:rPr b="0">
+                <a:solidFill>
+                  <a:srgbClr val="6E665B"/>
+                </a:solidFill>
+                <a:latin typeface="Segoe UI"/>
+              </a:rPr>
+              <a:t>Short chunks for 3G.</a:t>
+            </a:r>
+            <a:br>
+              <a:rPr sz="3200"/>
+            </a:br>
+            <a:r>
+              <a:rPr sz="3200"/>
+              <a:t>Readable body text.</a:t>
+            </a:r>
+            <a:br>
+              <a:rPr sz="3200"/>
+            </a:br>
+            <a:r>
+              <a:rPr sz="3200"/>
+              <a:t>Filipino / English toggle in header.</a:t>
+            </a:r>
+          </a:p>
+        </p:txBody>
+      </p:sp>
+      <p:sp>
+        <p:nvSpPr>
+          <p:cNvPr id="13" name="TextBox 12"/>
+          <p:cNvSpPr txBox="1"/>
+          <p:nvPr/>
+        </p:nvSpPr>
+        <p:spPr>
+          <a:xfrm>
+            <a:off x="7818120" y="2514600"/>
+            <a:ext cx="3703320" cy="2759730"/>
+          </a:xfrm>
+          <a:prstGeom prst="rect">
+            <a:avLst/>
+          </a:prstGeom>
+          <a:noFill/>
+        </p:spPr>
+        <p:txBody>
+          <a:bodyPr wrap="square">
+            <a:spAutoFit/>
+          </a:bodyPr>
+          <a:lstStyle/>
+          <a:p>
+            <a:pPr>
+              <a:spcAft>
+                <a:spcPts val="800"/>
+              </a:spcAft>
+            </a:pPr>
+            <a:r>
+              <a:rPr sz="2000" dirty="0">
+                <a:solidFill>
+                  <a:srgbClr val="241F1A"/>
+                </a:solidFill>
+                <a:latin typeface="Segoe UI"/>
+              </a:rPr>
+              <a:t>≈174 KB </a:t>
+            </a:r>
+            <a:r>
+              <a:rPr sz="2000" dirty="0" err="1">
+                <a:solidFill>
+                  <a:srgbClr val="241F1A"/>
+                </a:solidFill>
+                <a:latin typeface="Segoe UI"/>
+              </a:rPr>
+              <a:t>gz</a:t>
+            </a:r>
+            <a:r>
+              <a:rPr sz="2000" dirty="0">
+                <a:solidFill>
+                  <a:srgbClr val="241F1A"/>
+                </a:solidFill>
+                <a:latin typeface="Segoe UI"/>
+              </a:rPr>
+              <a:t> shared JS</a:t>
+            </a:r>
+            <a:br>
+              <a:rPr lang="en-US" sz="2000" dirty="0">
+                <a:solidFill>
+                  <a:srgbClr val="241F1A"/>
+                </a:solidFill>
+                <a:latin typeface="Segoe UI"/>
+              </a:rPr>
+            </a:br>
+            <a:r>
+              <a:rPr sz="2000" dirty="0">
+                <a:solidFill>
+                  <a:srgbClr val="241F1A"/>
+                </a:solidFill>
+                <a:latin typeface="Segoe UI"/>
+              </a:rPr>
+              <a:t>(budget: 220 KB)</a:t>
+            </a:r>
+          </a:p>
+          <a:p>
+            <a:pPr>
+              <a:spcAft>
+                <a:spcPts val="800"/>
+              </a:spcAft>
+            </a:pPr>
+            <a:br>
+              <a:rPr lang="en-US" sz="2000" dirty="0">
+                <a:solidFill>
+                  <a:srgbClr val="241F1A"/>
+                </a:solidFill>
+                <a:latin typeface="Segoe UI"/>
+              </a:rPr>
+            </a:br>
+            <a:r>
+              <a:rPr sz="2000" dirty="0">
+                <a:solidFill>
+                  <a:srgbClr val="241F1A"/>
+                </a:solidFill>
+                <a:latin typeface="Segoe UI"/>
+              </a:rPr>
+              <a:t>Seed → Sprout → Scholar → Expert → Mentor levels</a:t>
+            </a:r>
+          </a:p>
+          <a:p>
+            <a:pPr>
+              <a:spcAft>
+                <a:spcPts val="800"/>
+              </a:spcAft>
+            </a:pPr>
+            <a:br>
+              <a:rPr lang="en-US" sz="2000" dirty="0">
+                <a:solidFill>
+                  <a:srgbClr val="241F1A"/>
+                </a:solidFill>
+                <a:latin typeface="Segoe UI"/>
+              </a:rPr>
+            </a:br>
+            <a:r>
+              <a:rPr sz="2000" dirty="0">
+                <a:solidFill>
+                  <a:srgbClr val="241F1A"/>
+                </a:solidFill>
+                <a:latin typeface="Segoe UI"/>
+              </a:rPr>
+              <a:t>Roadmap: quizzes, XP bar, credential wallet</a:t>
+            </a:r>
+          </a:p>
+        </p:txBody>
+      </p:sp>
+      <p:sp>
+        <p:nvSpPr>
+          <p:cNvPr id="14" name="TextBox 13"/>
+          <p:cNvSpPr txBox="1"/>
+          <p:nvPr/>
+        </p:nvSpPr>
+        <p:spPr>
+          <a:xfrm>
+            <a:off x="548640" y="6446520"/>
+            <a:ext cx="4572000" cy="320040"/>
+          </a:xfrm>
+          <a:prstGeom prst="rect">
+            <a:avLst/>
+          </a:prstGeom>
+          <a:noFill/>
+        </p:spPr>
+        <p:txBody>
+          <a:bodyPr wrap="square" anchor="t">
+            <a:spAutoFit/>
+          </a:bodyPr>
+          <a:lstStyle/>
+          <a:p>
+            <a:pPr algn="l"/>
+            <a:r>
+              <a:rPr sz="1000" b="0">
+                <a:solidFill>
+                  <a:srgbClr val="6E665B"/>
+                </a:solidFill>
+                <a:latin typeface="Segoe UI"/>
+              </a:rPr>
+              <a:t>ANISKWELA  ·  Axon Enjin</a:t>
+            </a:r>
+          </a:p>
+        </p:txBody>
+      </p:sp>
+      <p:sp>
+        <p:nvSpPr>
+          <p:cNvPr id="15" name="TextBox 14"/>
+          <p:cNvSpPr txBox="1"/>
+          <p:nvPr/>
+        </p:nvSpPr>
+        <p:spPr>
+          <a:xfrm>
+            <a:off x="9601200" y="6446520"/>
+            <a:ext cx="2103120" cy="320040"/>
+          </a:xfrm>
+          <a:prstGeom prst="rect">
+            <a:avLst/>
+          </a:prstGeom>
+          <a:noFill/>
+        </p:spPr>
+        <p:txBody>
+          <a:bodyPr wrap="square" anchor="t">
+            <a:spAutoFit/>
+          </a:bodyPr>
+          <a:lstStyle/>
+          <a:p>
             <a:pPr algn="r"/>
             <a:r>
-              <a:rPr sz="1000" b="0">
-                <a:solidFill>
-                  <a:srgbClr val="6E665B"/>
-                </a:solidFill>
-                <a:latin typeface="Segoe UI"/>
-              </a:rPr>
-              <a:t>Grant partner deck  ·  5/10</a:t>
-            </a:r>
-          </a:p>
-        </p:txBody>
-      </p:sp>
-      <p:pic>
-        <p:nvPicPr>
-          <p:cNvPr id="10" name="Picture 9">
-            <a:extLst>
-              <a:ext uri="{FF2B5EF4-FFF2-40B4-BE49-F238E27FC236}">
-                <a16:creationId xmlns:a16="http://schemas.microsoft.com/office/drawing/2014/main" id="{666C0058-6276-427F-828B-651EC2344DE8}"/>
-              </a:ext>
-            </a:extLst>
-          </p:cNvPr>
-          <p:cNvPicPr>
-            <a:picLocks noChangeAspect="1"/>
-          </p:cNvPicPr>
-          <p:nvPr/>
-        </p:nvPicPr>
-        <p:blipFill>
-          <a:blip r:embed="rId3"/>
-          <a:stretch>
-            <a:fillRect/>
-          </a:stretch>
-        </p:blipFill>
-        <p:spPr>
-          <a:xfrm>
-            <a:off x="4381500" y="2631698"/>
-            <a:ext cx="3429000" cy="3429000"/>
-          </a:xfrm>
-          <a:prstGeom prst="rect">
-            <a:avLst/>
-          </a:prstGeom>
-        </p:spPr>
-      </p:pic>
+              <a:t>Grant partner deck  ·  5/11</a:t>
+            </a:r>
+          </a:p>
+        </p:txBody>
+      </p:sp>
     </p:spTree>
   </p:cSld>
   <p:clrMapOvr>
@@ -7049,14 +8131,14 @@
       </p:grpSpPr>
       <p:sp>
         <p:nvSpPr>
-          <p:cNvPr id="2" name="TextBox 1"/>
+          <p:cNvPr id="3" name="TextBox 2"/>
           <p:cNvSpPr txBox="1"/>
           <p:nvPr/>
         </p:nvSpPr>
         <p:spPr>
           <a:xfrm>
-            <a:off x="685800" y="502920"/>
-            <a:ext cx="3657600" cy="320040"/>
+            <a:off x="685800" y="868680"/>
+            <a:ext cx="10515600" cy="1077218"/>
           </a:xfrm>
           <a:prstGeom prst="rect">
             <a:avLst/>
@@ -7071,27 +8153,44 @@
           <a:p>
             <a:pPr algn="l"/>
             <a:r>
-              <a:rPr sz="1100" b="1">
-                <a:solidFill>
-                  <a:srgbClr val="3F8E5B"/>
-                </a:solidFill>
-                <a:latin typeface="Segoe UI"/>
-              </a:rPr>
-              <a:t>HOW IT WORKS</a:t>
-            </a:r>
-          </a:p>
-        </p:txBody>
-      </p:sp>
-      <p:sp>
-        <p:nvSpPr>
-          <p:cNvPr id="3" name="TextBox 2"/>
+              <a:rPr sz="3200" b="1" dirty="0">
+                <a:solidFill>
+                  <a:srgbClr val="6B4F3A"/>
+                </a:solidFill>
+                <a:latin typeface="Segoe UI"/>
+              </a:rPr>
+              <a:t>Teachers publish in an afternoon.</a:t>
+            </a:r>
+            <a:br>
+              <a:rPr lang="en-US" sz="3200" b="1" dirty="0">
+                <a:solidFill>
+                  <a:srgbClr val="6B4F3A"/>
+                </a:solidFill>
+                <a:latin typeface="Segoe UI"/>
+              </a:rPr>
+            </a:br>
+            <a:r>
+              <a:rPr sz="3200" b="1" dirty="0">
+                <a:solidFill>
+                  <a:srgbClr val="6B4F3A"/>
+                </a:solidFill>
+                <a:latin typeface="Segoe UI"/>
+              </a:rPr>
+              <a:t>Funders get criteria they can audit.</a:t>
+            </a:r>
+          </a:p>
+        </p:txBody>
+      </p:sp>
+      <p:sp>
+        <p:nvSpPr>
+          <p:cNvPr id="4" name="TextBox 3"/>
           <p:cNvSpPr txBox="1"/>
           <p:nvPr/>
         </p:nvSpPr>
         <p:spPr>
           <a:xfrm>
-            <a:off x="685800" y="868680"/>
-            <a:ext cx="10515600" cy="822960"/>
+            <a:off x="685800" y="1991618"/>
+            <a:ext cx="10515600" cy="640080"/>
           </a:xfrm>
           <a:prstGeom prst="rect">
             <a:avLst/>
@@ -7106,27 +8205,27 @@
           <a:p>
             <a:pPr algn="l"/>
             <a:r>
-              <a:rPr sz="3200" b="1">
-                <a:solidFill>
-                  <a:srgbClr val="6B4F3A"/>
-                </a:solidFill>
-                <a:latin typeface="Segoe UI"/>
-              </a:rPr>
-              <a:t>From document to anchored credential.</a:t>
-            </a:r>
-          </a:p>
-        </p:txBody>
-      </p:sp>
-      <p:sp>
-        <p:nvSpPr>
-          <p:cNvPr id="4" name="TextBox 3"/>
+              <a:rPr sz="1700" b="0">
+                <a:solidFill>
+                  <a:srgbClr val="6E665B"/>
+                </a:solidFill>
+                <a:latin typeface="Segoe UI"/>
+              </a:rPr>
+              <a:t>Upload and generate is live today. The funder eligibility console is specified and schema-ready.</a:t>
+            </a:r>
+          </a:p>
+        </p:txBody>
+      </p:sp>
+      <p:sp>
+        <p:nvSpPr>
+          <p:cNvPr id="7" name="TextBox 6"/>
           <p:cNvSpPr txBox="1"/>
           <p:nvPr/>
         </p:nvSpPr>
         <p:spPr>
           <a:xfrm>
-            <a:off x="685800" y="1600200"/>
-            <a:ext cx="10515600" cy="640080"/>
+            <a:off x="548640" y="6446520"/>
+            <a:ext cx="4572000" cy="320040"/>
           </a:xfrm>
           <a:prstGeom prst="rect">
             <a:avLst/>
@@ -7141,625 +8240,27 @@
           <a:p>
             <a:pPr algn="l"/>
             <a:r>
-              <a:rPr sz="1700" b="0">
+              <a:rPr sz="1000" b="0">
                 <a:solidFill>
                   <a:srgbClr val="6E665B"/>
                 </a:solidFill>
                 <a:latin typeface="Segoe UI"/>
               </a:rPr>
-              <a:t>AI runs once per course. Learners never wait on a model when they open a lesson.</a:t>
-            </a:r>
-          </a:p>
-        </p:txBody>
-      </p:sp>
-      <p:sp>
-        <p:nvSpPr>
-          <p:cNvPr id="5" name="Rounded Rectangle 4"/>
-          <p:cNvSpPr/>
-          <p:nvPr/>
-        </p:nvSpPr>
-        <p:spPr>
-          <a:xfrm>
-            <a:off x="502920" y="2606040"/>
-            <a:ext cx="1691640" cy="1417320"/>
-          </a:xfrm>
-          <a:prstGeom prst="roundRect">
-            <a:avLst/>
-          </a:prstGeom>
-          <a:solidFill>
-            <a:srgbClr val="FFFFFF"/>
-          </a:solidFill>
-          <a:ln w="12700">
-            <a:solidFill>
-              <a:srgbClr val="E7E0D3"/>
-            </a:solidFill>
-          </a:ln>
-        </p:spPr>
-        <p:style>
-          <a:lnRef idx="1">
-            <a:schemeClr val="accent1"/>
-          </a:lnRef>
-          <a:fillRef idx="3">
-            <a:schemeClr val="accent1"/>
-          </a:fillRef>
-          <a:effectRef idx="2">
-            <a:schemeClr val="accent1"/>
-          </a:effectRef>
-          <a:fontRef idx="minor">
-            <a:schemeClr val="lt1"/>
-          </a:fontRef>
-        </p:style>
-        <p:txBody>
-          <a:bodyPr wrap="square" lIns="137160" tIns="109728" rIns="137160" bIns="91440" rtlCol="0" anchor="ctr"/>
-          <a:lstStyle/>
-          <a:p>
-            <a:pPr>
-              <a:spcAft>
-                <a:spcPts val="400"/>
-              </a:spcAft>
-            </a:pPr>
-            <a:r>
-              <a:rPr sz="1000" b="1" dirty="0">
-                <a:solidFill>
-                  <a:srgbClr val="3F8E5B"/>
-                </a:solidFill>
-                <a:latin typeface="Segoe UI"/>
-              </a:rPr>
-              <a:t>1</a:t>
-            </a:r>
-          </a:p>
-          <a:p>
-            <a:pPr>
-              <a:spcAft>
-                <a:spcPts val="600"/>
-              </a:spcAft>
-            </a:pPr>
-            <a:r>
-              <a:rPr sz="1600" b="1" dirty="0">
-                <a:solidFill>
-                  <a:srgbClr val="6B4F3A"/>
-                </a:solidFill>
-                <a:latin typeface="Segoe UI"/>
-              </a:rPr>
-              <a:t>Upload</a:t>
-            </a:r>
-          </a:p>
-          <a:p>
-            <a:r>
-              <a:rPr sz="1200" dirty="0">
-                <a:solidFill>
-                  <a:srgbClr val="6E665B"/>
-                </a:solidFill>
-                <a:latin typeface="Segoe UI"/>
-              </a:rPr>
-              <a:t>Teacher sends PDF or doc.</a:t>
-            </a:r>
-          </a:p>
-        </p:txBody>
-      </p:sp>
-      <p:sp>
-        <p:nvSpPr>
-          <p:cNvPr id="6" name="Rounded Rectangle 5"/>
-          <p:cNvSpPr/>
-          <p:nvPr/>
-        </p:nvSpPr>
-        <p:spPr>
-          <a:xfrm>
-            <a:off x="2377439" y="2606040"/>
-            <a:ext cx="1691640" cy="1417320"/>
-          </a:xfrm>
-          <a:prstGeom prst="roundRect">
-            <a:avLst/>
-          </a:prstGeom>
-          <a:solidFill>
-            <a:srgbClr val="FFFFFF"/>
-          </a:solidFill>
-          <a:ln w="12700">
-            <a:solidFill>
-              <a:srgbClr val="E7E0D3"/>
-            </a:solidFill>
-          </a:ln>
-        </p:spPr>
-        <p:style>
-          <a:lnRef idx="1">
-            <a:schemeClr val="accent1"/>
-          </a:lnRef>
-          <a:fillRef idx="3">
-            <a:schemeClr val="accent1"/>
-          </a:fillRef>
-          <a:effectRef idx="2">
-            <a:schemeClr val="accent1"/>
-          </a:effectRef>
-          <a:fontRef idx="minor">
-            <a:schemeClr val="lt1"/>
-          </a:fontRef>
-        </p:style>
-        <p:txBody>
-          <a:bodyPr wrap="square" lIns="137160" tIns="109728" rIns="137160" bIns="91440" rtlCol="0" anchor="ctr"/>
-          <a:lstStyle/>
-          <a:p>
-            <a:pPr>
-              <a:spcAft>
-                <a:spcPts val="400"/>
-              </a:spcAft>
-            </a:pPr>
-            <a:r>
-              <a:rPr sz="1000" b="1" dirty="0">
-                <a:solidFill>
-                  <a:srgbClr val="3F8E5B"/>
-                </a:solidFill>
-                <a:latin typeface="Segoe UI"/>
-              </a:rPr>
-              <a:t>2</a:t>
-            </a:r>
-          </a:p>
-          <a:p>
-            <a:pPr>
-              <a:spcAft>
-                <a:spcPts val="600"/>
-              </a:spcAft>
-            </a:pPr>
-            <a:r>
-              <a:rPr sz="1600" b="1" dirty="0">
-                <a:solidFill>
-                  <a:srgbClr val="6B4F3A"/>
-                </a:solidFill>
-                <a:latin typeface="Segoe UI"/>
-              </a:rPr>
-              <a:t>Generate</a:t>
-            </a:r>
-          </a:p>
-          <a:p>
-            <a:r>
-              <a:rPr sz="1200" dirty="0">
-                <a:solidFill>
-                  <a:srgbClr val="6E665B"/>
-                </a:solidFill>
-                <a:latin typeface="Segoe UI"/>
-              </a:rPr>
-              <a:t>Azure AI Foundry drafts structure.</a:t>
-            </a:r>
-          </a:p>
-        </p:txBody>
-      </p:sp>
-      <p:sp>
-        <p:nvSpPr>
-          <p:cNvPr id="7" name="Rounded Rectangle 6"/>
-          <p:cNvSpPr/>
-          <p:nvPr/>
-        </p:nvSpPr>
-        <p:spPr>
-          <a:xfrm>
-            <a:off x="4251959" y="2606040"/>
-            <a:ext cx="1691640" cy="1417320"/>
-          </a:xfrm>
-          <a:prstGeom prst="roundRect">
-            <a:avLst/>
-          </a:prstGeom>
-          <a:solidFill>
-            <a:srgbClr val="FFFFFF"/>
-          </a:solidFill>
-          <a:ln w="12700">
-            <a:solidFill>
-              <a:srgbClr val="E7E0D3"/>
-            </a:solidFill>
-          </a:ln>
-        </p:spPr>
-        <p:style>
-          <a:lnRef idx="1">
-            <a:schemeClr val="accent1"/>
-          </a:lnRef>
-          <a:fillRef idx="3">
-            <a:schemeClr val="accent1"/>
-          </a:fillRef>
-          <a:effectRef idx="2">
-            <a:schemeClr val="accent1"/>
-          </a:effectRef>
-          <a:fontRef idx="minor">
-            <a:schemeClr val="lt1"/>
-          </a:fontRef>
-        </p:style>
-        <p:txBody>
-          <a:bodyPr wrap="square" lIns="137160" tIns="109728" rIns="137160" bIns="91440" rtlCol="0" anchor="ctr"/>
-          <a:lstStyle/>
-          <a:p>
-            <a:pPr>
-              <a:spcAft>
-                <a:spcPts val="400"/>
-              </a:spcAft>
-            </a:pPr>
-            <a:r>
-              <a:rPr sz="1000" b="1" dirty="0">
-                <a:solidFill>
-                  <a:srgbClr val="3F8E5B"/>
-                </a:solidFill>
-                <a:latin typeface="Segoe UI"/>
-              </a:rPr>
-              <a:t>3</a:t>
-            </a:r>
-          </a:p>
-          <a:p>
-            <a:pPr>
-              <a:spcAft>
-                <a:spcPts val="600"/>
-              </a:spcAft>
-            </a:pPr>
-            <a:r>
-              <a:rPr sz="1600" b="1" dirty="0">
-                <a:solidFill>
-                  <a:srgbClr val="6B4F3A"/>
-                </a:solidFill>
-                <a:latin typeface="Segoe UI"/>
-              </a:rPr>
-              <a:t>Review</a:t>
-            </a:r>
-          </a:p>
-          <a:p>
-            <a:r>
-              <a:rPr sz="1200" dirty="0">
-                <a:solidFill>
-                  <a:srgbClr val="6E665B"/>
-                </a:solidFill>
-                <a:latin typeface="Segoe UI"/>
-              </a:rPr>
-              <a:t>Teacher edits and publishes.</a:t>
-            </a:r>
-          </a:p>
-        </p:txBody>
-      </p:sp>
-      <p:sp>
-        <p:nvSpPr>
-          <p:cNvPr id="8" name="Rounded Rectangle 7"/>
-          <p:cNvSpPr/>
-          <p:nvPr/>
-        </p:nvSpPr>
-        <p:spPr>
-          <a:xfrm>
-            <a:off x="6126479" y="2606040"/>
-            <a:ext cx="1691640" cy="1417320"/>
-          </a:xfrm>
-          <a:prstGeom prst="roundRect">
-            <a:avLst/>
-          </a:prstGeom>
-          <a:solidFill>
-            <a:srgbClr val="FFFFFF"/>
-          </a:solidFill>
-          <a:ln w="12700">
-            <a:solidFill>
-              <a:srgbClr val="E7E0D3"/>
-            </a:solidFill>
-          </a:ln>
-        </p:spPr>
-        <p:style>
-          <a:lnRef idx="1">
-            <a:schemeClr val="accent1"/>
-          </a:lnRef>
-          <a:fillRef idx="3">
-            <a:schemeClr val="accent1"/>
-          </a:fillRef>
-          <a:effectRef idx="2">
-            <a:schemeClr val="accent1"/>
-          </a:effectRef>
-          <a:fontRef idx="minor">
-            <a:schemeClr val="lt1"/>
-          </a:fontRef>
-        </p:style>
-        <p:txBody>
-          <a:bodyPr wrap="square" lIns="137160" tIns="109728" rIns="137160" bIns="91440" rtlCol="0" anchor="ctr"/>
-          <a:lstStyle/>
-          <a:p>
-            <a:pPr>
-              <a:spcAft>
-                <a:spcPts val="400"/>
-              </a:spcAft>
-            </a:pPr>
-            <a:r>
-              <a:rPr sz="1000" b="1" dirty="0">
-                <a:solidFill>
-                  <a:srgbClr val="3F8E5B"/>
-                </a:solidFill>
-                <a:latin typeface="Segoe UI"/>
-              </a:rPr>
-              <a:t>4</a:t>
-            </a:r>
-          </a:p>
-          <a:p>
-            <a:pPr>
-              <a:spcAft>
-                <a:spcPts val="600"/>
-              </a:spcAft>
-            </a:pPr>
-            <a:r>
-              <a:rPr sz="1600" b="1" dirty="0">
-                <a:solidFill>
-                  <a:srgbClr val="6B4F3A"/>
-                </a:solidFill>
-                <a:latin typeface="Segoe UI"/>
-              </a:rPr>
-              <a:t>Learn</a:t>
-            </a:r>
-          </a:p>
-          <a:p>
-            <a:r>
-              <a:rPr sz="1200" dirty="0">
-                <a:solidFill>
-                  <a:srgbClr val="6E665B"/>
-                </a:solidFill>
-                <a:latin typeface="Segoe UI"/>
-              </a:rPr>
-              <a:t>Learner completes lessons and quizzes.</a:t>
-            </a:r>
-          </a:p>
-        </p:txBody>
-      </p:sp>
-      <p:sp>
-        <p:nvSpPr>
-          <p:cNvPr id="9" name="Rounded Rectangle 8"/>
-          <p:cNvSpPr/>
-          <p:nvPr/>
-        </p:nvSpPr>
-        <p:spPr>
-          <a:xfrm>
-            <a:off x="8000999" y="2606040"/>
-            <a:ext cx="1691640" cy="1417320"/>
-          </a:xfrm>
-          <a:prstGeom prst="roundRect">
-            <a:avLst/>
-          </a:prstGeom>
-          <a:solidFill>
-            <a:srgbClr val="FFFFFF"/>
-          </a:solidFill>
-          <a:ln w="12700">
-            <a:solidFill>
-              <a:srgbClr val="E7E0D3"/>
-            </a:solidFill>
-          </a:ln>
-        </p:spPr>
-        <p:style>
-          <a:lnRef idx="1">
-            <a:schemeClr val="accent1"/>
-          </a:lnRef>
-          <a:fillRef idx="3">
-            <a:schemeClr val="accent1"/>
-          </a:fillRef>
-          <a:effectRef idx="2">
-            <a:schemeClr val="accent1"/>
-          </a:effectRef>
-          <a:fontRef idx="minor">
-            <a:schemeClr val="lt1"/>
-          </a:fontRef>
-        </p:style>
-        <p:txBody>
-          <a:bodyPr wrap="square" lIns="137160" tIns="109728" rIns="137160" bIns="91440" rtlCol="0" anchor="ctr"/>
-          <a:lstStyle/>
-          <a:p>
-            <a:pPr>
-              <a:spcAft>
-                <a:spcPts val="400"/>
-              </a:spcAft>
-            </a:pPr>
-            <a:r>
-              <a:rPr sz="1000" b="1" dirty="0">
-                <a:solidFill>
-                  <a:srgbClr val="3F8E5B"/>
-                </a:solidFill>
-                <a:latin typeface="Segoe UI"/>
-              </a:rPr>
-              <a:t>5</a:t>
-            </a:r>
-          </a:p>
-          <a:p>
-            <a:pPr>
-              <a:spcAft>
-                <a:spcPts val="600"/>
-              </a:spcAft>
-            </a:pPr>
-            <a:r>
-              <a:rPr sz="1600" b="1" dirty="0">
-                <a:solidFill>
-                  <a:srgbClr val="6B4F3A"/>
-                </a:solidFill>
-                <a:latin typeface="Segoe UI"/>
-              </a:rPr>
-              <a:t>Credential</a:t>
-            </a:r>
-          </a:p>
-          <a:p>
-            <a:r>
-              <a:rPr sz="1200" dirty="0">
-                <a:solidFill>
-                  <a:srgbClr val="6E665B"/>
-                </a:solidFill>
-                <a:latin typeface="Segoe UI"/>
-              </a:rPr>
-              <a:t>Platform issues signed W3C VC.</a:t>
-            </a:r>
-          </a:p>
-        </p:txBody>
-      </p:sp>
-      <p:sp>
-        <p:nvSpPr>
-          <p:cNvPr id="10" name="Rounded Rectangle 9"/>
-          <p:cNvSpPr/>
-          <p:nvPr/>
-        </p:nvSpPr>
-        <p:spPr>
-          <a:xfrm>
-            <a:off x="9875520" y="2606040"/>
-            <a:ext cx="1691640" cy="1417320"/>
-          </a:xfrm>
-          <a:prstGeom prst="roundRect">
-            <a:avLst/>
-          </a:prstGeom>
-          <a:solidFill>
-            <a:srgbClr val="FFFFFF"/>
-          </a:solidFill>
-          <a:ln w="12700">
-            <a:solidFill>
-              <a:srgbClr val="E7E0D3"/>
-            </a:solidFill>
-          </a:ln>
-        </p:spPr>
-        <p:style>
-          <a:lnRef idx="1">
-            <a:schemeClr val="accent1"/>
-          </a:lnRef>
-          <a:fillRef idx="3">
-            <a:schemeClr val="accent1"/>
-          </a:fillRef>
-          <a:effectRef idx="2">
-            <a:schemeClr val="accent1"/>
-          </a:effectRef>
-          <a:fontRef idx="minor">
-            <a:schemeClr val="lt1"/>
-          </a:fontRef>
-        </p:style>
-        <p:txBody>
-          <a:bodyPr wrap="square" lIns="137160" tIns="109728" rIns="137160" bIns="91440" rtlCol="0" anchor="ctr"/>
-          <a:lstStyle/>
-          <a:p>
-            <a:pPr>
-              <a:spcAft>
-                <a:spcPts val="400"/>
-              </a:spcAft>
-            </a:pPr>
-            <a:r>
-              <a:rPr sz="1000" b="1" dirty="0">
-                <a:solidFill>
-                  <a:srgbClr val="3F8E5B"/>
-                </a:solidFill>
-                <a:latin typeface="Segoe UI"/>
-              </a:rPr>
-              <a:t>6</a:t>
-            </a:r>
-          </a:p>
-          <a:p>
-            <a:pPr>
-              <a:spcAft>
-                <a:spcPts val="600"/>
-              </a:spcAft>
-            </a:pPr>
-            <a:r>
-              <a:rPr sz="1600" b="1" dirty="0">
-                <a:solidFill>
-                  <a:srgbClr val="6B4F3A"/>
-                </a:solidFill>
-                <a:latin typeface="Segoe UI"/>
-              </a:rPr>
-              <a:t>Anchor</a:t>
-            </a:r>
-          </a:p>
-          <a:p>
-            <a:r>
-              <a:rPr sz="1200" dirty="0">
-                <a:solidFill>
-                  <a:srgbClr val="6E665B"/>
-                </a:solidFill>
-                <a:latin typeface="Segoe UI"/>
-              </a:rPr>
-              <a:t>Hash recorded on Stellar </a:t>
-            </a:r>
-            <a:r>
-              <a:rPr sz="1200" dirty="0" err="1">
-                <a:solidFill>
-                  <a:srgbClr val="6E665B"/>
-                </a:solidFill>
-                <a:latin typeface="Segoe UI"/>
-              </a:rPr>
-              <a:t>Testnet</a:t>
-            </a:r>
-            <a:r>
-              <a:rPr sz="1200" dirty="0">
-                <a:solidFill>
-                  <a:srgbClr val="6E665B"/>
-                </a:solidFill>
-                <a:latin typeface="Segoe UI"/>
-              </a:rPr>
-              <a:t>.</a:t>
-            </a:r>
-          </a:p>
-        </p:txBody>
-      </p:sp>
-      <p:sp>
-        <p:nvSpPr>
-          <p:cNvPr id="11" name="Rounded Rectangle 10"/>
-          <p:cNvSpPr/>
-          <p:nvPr/>
-        </p:nvSpPr>
-        <p:spPr>
-          <a:xfrm>
-            <a:off x="685800" y="4572000"/>
-            <a:ext cx="10881360" cy="1234440"/>
-          </a:xfrm>
-          <a:prstGeom prst="roundRect">
-            <a:avLst/>
-          </a:prstGeom>
-          <a:solidFill>
-            <a:srgbClr val="FFFFFF"/>
-          </a:solidFill>
-          <a:ln w="12700">
-            <a:solidFill>
-              <a:srgbClr val="E7E0D3"/>
-            </a:solidFill>
-          </a:ln>
-        </p:spPr>
-        <p:style>
-          <a:lnRef idx="1">
-            <a:schemeClr val="accent1"/>
-          </a:lnRef>
-          <a:fillRef idx="3">
-            <a:schemeClr val="accent1"/>
-          </a:fillRef>
-          <a:effectRef idx="2">
-            <a:schemeClr val="accent1"/>
-          </a:effectRef>
-          <a:fontRef idx="minor">
-            <a:schemeClr val="lt1"/>
-          </a:fontRef>
-        </p:style>
-        <p:txBody>
-          <a:bodyPr wrap="square" lIns="137160" tIns="109728" rIns="137160" bIns="91440" rtlCol="0" anchor="ctr"/>
-          <a:lstStyle/>
-          <a:p>
-            <a:pPr algn="ctr">
-              <a:spcAft>
-                <a:spcPts val="600"/>
-              </a:spcAft>
-            </a:pPr>
-            <a:r>
-              <a:rPr sz="3200" b="1" dirty="0">
-                <a:solidFill>
-                  <a:srgbClr val="6B4F3A"/>
-                </a:solidFill>
-                <a:latin typeface="Segoe UI"/>
-              </a:rPr>
-              <a:t>Human in the loop</a:t>
-            </a:r>
-          </a:p>
-          <a:p>
-            <a:pPr algn="ctr"/>
-            <a:r>
-              <a:rPr sz="2400" dirty="0">
-                <a:solidFill>
-                  <a:srgbClr val="6E665B"/>
-                </a:solidFill>
-                <a:latin typeface="Segoe UI"/>
-              </a:rPr>
-              <a:t>Mandatory teacher review before any course goes live.</a:t>
-            </a:r>
-          </a:p>
-        </p:txBody>
-      </p:sp>
-      <p:sp>
-        <p:nvSpPr>
-          <p:cNvPr id="13" name="TextBox 12"/>
+              <a:t>ANISKWELA  ·  Axon Enjin</a:t>
+            </a:r>
+          </a:p>
+        </p:txBody>
+      </p:sp>
+      <p:sp>
+        <p:nvSpPr>
+          <p:cNvPr id="8" name="TextBox 7"/>
           <p:cNvSpPr txBox="1"/>
           <p:nvPr/>
         </p:nvSpPr>
         <p:spPr>
           <a:xfrm>
-            <a:off x="548640" y="6446520"/>
-            <a:ext cx="4572000" cy="320040"/>
+            <a:off x="9601200" y="6446520"/>
+            <a:ext cx="2103120" cy="320040"/>
           </a:xfrm>
           <a:prstGeom prst="rect">
             <a:avLst/>
@@ -7772,54 +8273,43 @@
           </a:bodyPr>
           <a:lstStyle/>
           <a:p>
-            <a:pPr algn="l"/>
-            <a:r>
-              <a:rPr sz="1000" b="0">
-                <a:solidFill>
-                  <a:srgbClr val="6E665B"/>
-                </a:solidFill>
-                <a:latin typeface="Segoe UI"/>
-              </a:rPr>
-              <a:t>ANISKWELA  ·  Axon Enjin</a:t>
-            </a:r>
-          </a:p>
-        </p:txBody>
-      </p:sp>
-      <p:sp>
-        <p:nvSpPr>
-          <p:cNvPr id="14" name="TextBox 13"/>
-          <p:cNvSpPr txBox="1"/>
+            <a:pPr algn="r"/>
+            <a:r>
+              <a:t>Grant partner deck  ·  6/11</a:t>
+            </a:r>
+          </a:p>
+        </p:txBody>
+      </p:sp>
+      <p:pic>
+        <p:nvPicPr>
+          <p:cNvPr id="10" name="Picture 9">
+            <a:extLst>
+              <a:ext uri="{FF2B5EF4-FFF2-40B4-BE49-F238E27FC236}">
+                <a16:creationId xmlns:a16="http://schemas.microsoft.com/office/drawing/2014/main" id="{666C0058-6276-427F-828B-651EC2344DE8}"/>
+              </a:ext>
+            </a:extLst>
+          </p:cNvPr>
+          <p:cNvPicPr>
+            <a:picLocks noChangeAspect="1"/>
+          </p:cNvPicPr>
           <p:nvPr/>
-        </p:nvSpPr>
-        <p:spPr>
-          <a:xfrm>
-            <a:off x="9601200" y="6446520"/>
-            <a:ext cx="2103120" cy="320040"/>
+        </p:nvPicPr>
+        <p:blipFill>
+          <a:blip r:embed="rId3"/>
+          <a:stretch>
+            <a:fillRect/>
+          </a:stretch>
+        </p:blipFill>
+        <p:spPr>
+          <a:xfrm>
+            <a:off x="4381500" y="2631698"/>
+            <a:ext cx="3429000" cy="3429000"/>
           </a:xfrm>
           <a:prstGeom prst="rect">
             <a:avLst/>
           </a:prstGeom>
-          <a:noFill/>
-        </p:spPr>
-        <p:txBody>
-          <a:bodyPr wrap="square" anchor="t">
-            <a:spAutoFit/>
-          </a:bodyPr>
-          <a:lstStyle/>
-          <a:p>
-            <a:pPr algn="r"/>
-            <a:r>
-              <a:rPr sz="1000" b="0">
-                <a:solidFill>
-                  <a:srgbClr val="6E665B"/>
-                </a:solidFill>
-                <a:latin typeface="Segoe UI"/>
-              </a:rPr>
-              <a:t>Grant partner deck  ·  6/10</a:t>
-            </a:r>
-          </a:p>
-        </p:txBody>
-      </p:sp>
+        </p:spPr>
+      </p:pic>
     </p:spTree>
   </p:cSld>
   <p:clrMapOvr>
@@ -7883,7 +8373,7 @@
                 </a:solidFill>
                 <a:latin typeface="Segoe UI"/>
               </a:rPr>
-              <a:t>TRUST LAYER</a:t>
+              <a:t>HOW IT WORKS</a:t>
             </a:r>
           </a:p>
         </p:txBody>
@@ -7918,7 +8408,7 @@
                 </a:solidFill>
                 <a:latin typeface="Segoe UI"/>
               </a:rPr>
-              <a:t>Merit ledger plus verifiable credentials.</a:t>
+              <a:t>From document to anchored credential.</a:t>
             </a:r>
           </a:p>
         </p:txBody>
@@ -7953,7 +8443,7 @@
                 </a:solidFill>
                 <a:latin typeface="Segoe UI"/>
               </a:rPr>
-              <a:t>Open standards. Hash-only on-chain. A public verifier anyone can use without an account.</a:t>
+              <a:t>AI runs once per course. Learners never wait on a model when they open a lesson.</a:t>
             </a:r>
           </a:p>
         </p:txBody>
@@ -7966,8 +8456,8 @@
         </p:nvSpPr>
         <p:spPr>
           <a:xfrm>
-            <a:off x="685800" y="2423160"/>
-            <a:ext cx="3383280" cy="2194560"/>
+            <a:off x="502920" y="2606040"/>
+            <a:ext cx="1691640" cy="1417320"/>
           </a:xfrm>
           <a:prstGeom prst="roundRect">
             <a:avLst/>
@@ -7996,7 +8486,7 @@
           </a:fontRef>
         </p:style>
         <p:txBody>
-          <a:bodyPr wrap="square" lIns="137160" tIns="109728" rIns="137160" bIns="91440" rtlCol="0" anchor="t"/>
+          <a:bodyPr wrap="square" lIns="137160" tIns="109728" rIns="137160" bIns="91440" rtlCol="0" anchor="ctr"/>
           <a:lstStyle/>
           <a:p>
             <a:pPr>
@@ -8005,13 +8495,13 @@
               </a:spcAft>
             </a:pPr>
             <a:r>
-              <a:rPr sz="1200" b="1" dirty="0">
-                <a:solidFill>
-                  <a:srgbClr val="C8852A"/>
-                </a:solidFill>
-                <a:latin typeface="Segoe UI"/>
-              </a:rPr>
-              <a:t>Roadmap</a:t>
+              <a:rPr sz="1000" b="1" dirty="0">
+                <a:solidFill>
+                  <a:srgbClr val="3F8E5B"/>
+                </a:solidFill>
+                <a:latin typeface="Segoe UI"/>
+              </a:rPr>
+              <a:t>1</a:t>
             </a:r>
           </a:p>
           <a:p>
@@ -8021,24 +8511,24 @@
               </a:spcAft>
             </a:pPr>
             <a:r>
-              <a:rPr sz="2400" b="1" dirty="0">
+              <a:rPr sz="1600" b="1" dirty="0">
                 <a:solidFill>
                   <a:srgbClr val="6B4F3A"/>
                 </a:solidFill>
                 <a:latin typeface="Segoe UI"/>
               </a:rPr>
-              <a:t>Merit ledger</a:t>
-            </a:r>
-          </a:p>
-          <a:p>
-            <a:r>
-              <a:rPr dirty="0">
+              <a:t>Upload</a:t>
+            </a:r>
+          </a:p>
+          <a:p>
+            <a:r>
+              <a:rPr sz="1200" dirty="0">
                 <a:solidFill>
                   <a:srgbClr val="6E665B"/>
                 </a:solidFill>
                 <a:latin typeface="Segoe UI"/>
               </a:rPr>
-              <a:t>Append-only XP events. Badges for consistency. Readable by funders when setting eligibility rules.</a:t>
+              <a:t>Teacher sends PDF or doc.</a:t>
             </a:r>
           </a:p>
         </p:txBody>
@@ -8051,8 +8541,8 @@
         </p:nvSpPr>
         <p:spPr>
           <a:xfrm>
-            <a:off x="4343400" y="2423160"/>
-            <a:ext cx="3383280" cy="2194560"/>
+            <a:off x="2377439" y="2606040"/>
+            <a:ext cx="1691640" cy="1417320"/>
           </a:xfrm>
           <a:prstGeom prst="roundRect">
             <a:avLst/>
@@ -8081,7 +8571,7 @@
           </a:fontRef>
         </p:style>
         <p:txBody>
-          <a:bodyPr wrap="square" lIns="137160" tIns="109728" rIns="137160" bIns="91440" rtlCol="0" anchor="t"/>
+          <a:bodyPr wrap="square" lIns="137160" tIns="109728" rIns="137160" bIns="91440" rtlCol="0" anchor="ctr"/>
           <a:lstStyle/>
           <a:p>
             <a:pPr>
@@ -8090,13 +8580,13 @@
               </a:spcAft>
             </a:pPr>
             <a:r>
-              <a:rPr sz="1200" b="1" dirty="0">
-                <a:solidFill>
-                  <a:srgbClr val="C8852A"/>
-                </a:solidFill>
-                <a:latin typeface="Segoe UI"/>
-              </a:rPr>
-              <a:t>Roadmap</a:t>
+              <a:rPr sz="1000" b="1" dirty="0">
+                <a:solidFill>
+                  <a:srgbClr val="3F8E5B"/>
+                </a:solidFill>
+                <a:latin typeface="Segoe UI"/>
+              </a:rPr>
+              <a:t>2</a:t>
             </a:r>
           </a:p>
           <a:p>
@@ -8106,24 +8596,24 @@
               </a:spcAft>
             </a:pPr>
             <a:r>
-              <a:rPr sz="2400" b="1" dirty="0">
+              <a:rPr sz="1600" b="1" dirty="0">
                 <a:solidFill>
                   <a:srgbClr val="6B4F3A"/>
                 </a:solidFill>
                 <a:latin typeface="Segoe UI"/>
               </a:rPr>
-              <a:t>W3C VC + OB 3.0</a:t>
-            </a:r>
-          </a:p>
-          <a:p>
-            <a:r>
-              <a:rPr dirty="0">
+              <a:t>Generate</a:t>
+            </a:r>
+          </a:p>
+          <a:p>
+            <a:r>
+              <a:rPr sz="1200" dirty="0">
                 <a:solidFill>
                   <a:srgbClr val="6E665B"/>
                 </a:solidFill>
                 <a:latin typeface="Segoe UI"/>
               </a:rPr>
-              <a:t>Portable credential any OB 3.0 verifier can check. Learner name on the card, not on the chain.</a:t>
+              <a:t>Azure AI Foundry drafts structure.</a:t>
             </a:r>
           </a:p>
         </p:txBody>
@@ -8136,8 +8626,8 @@
         </p:nvSpPr>
         <p:spPr>
           <a:xfrm>
-            <a:off x="8001000" y="2423160"/>
-            <a:ext cx="3520440" cy="2194560"/>
+            <a:off x="4251959" y="2606040"/>
+            <a:ext cx="1691640" cy="1417320"/>
           </a:xfrm>
           <a:prstGeom prst="roundRect">
             <a:avLst/>
@@ -8166,7 +8656,7 @@
           </a:fontRef>
         </p:style>
         <p:txBody>
-          <a:bodyPr wrap="square" lIns="137160" tIns="109728" rIns="137160" bIns="91440" rtlCol="0" anchor="t"/>
+          <a:bodyPr wrap="square" lIns="137160" tIns="109728" rIns="137160" bIns="91440" rtlCol="0" anchor="ctr"/>
           <a:lstStyle/>
           <a:p>
             <a:pPr>
@@ -8175,13 +8665,13 @@
               </a:spcAft>
             </a:pPr>
             <a:r>
-              <a:rPr sz="1200" b="1" dirty="0">
-                <a:solidFill>
-                  <a:srgbClr val="C8852A"/>
-                </a:solidFill>
-                <a:latin typeface="Segoe UI"/>
-              </a:rPr>
-              <a:t>Roadmap</a:t>
+              <a:rPr sz="1000" b="1" dirty="0">
+                <a:solidFill>
+                  <a:srgbClr val="3F8E5B"/>
+                </a:solidFill>
+                <a:latin typeface="Segoe UI"/>
+              </a:rPr>
+              <a:t>3</a:t>
             </a:r>
           </a:p>
           <a:p>
@@ -8191,24 +8681,24 @@
               </a:spcAft>
             </a:pPr>
             <a:r>
-              <a:rPr sz="2400" b="1" dirty="0">
+              <a:rPr sz="1600" b="1" dirty="0">
                 <a:solidFill>
                   <a:srgbClr val="6B4F3A"/>
                 </a:solidFill>
                 <a:latin typeface="Segoe UI"/>
               </a:rPr>
-              <a:t>Public verifier</a:t>
-            </a:r>
-          </a:p>
-          <a:p>
-            <a:r>
-              <a:rPr dirty="0">
+              <a:t>Review</a:t>
+            </a:r>
+          </a:p>
+          <a:p>
+            <a:r>
+              <a:rPr sz="1200" dirty="0">
                 <a:solidFill>
                   <a:srgbClr val="6E665B"/>
                 </a:solidFill>
                 <a:latin typeface="Segoe UI"/>
               </a:rPr>
-              <a:t>URL or QR → valid or invalid, with course, date, and score. No login required.</a:t>
+              <a:t>Teacher edits and publishes.</a:t>
             </a:r>
           </a:p>
         </p:txBody>
@@ -8221,8 +8711,8 @@
         </p:nvSpPr>
         <p:spPr>
           <a:xfrm>
-            <a:off x="685800" y="4892040"/>
-            <a:ext cx="10835640" cy="1051560"/>
+            <a:off x="6126479" y="2606040"/>
+            <a:ext cx="1691640" cy="1417320"/>
           </a:xfrm>
           <a:prstGeom prst="roundRect">
             <a:avLst/>
@@ -8254,64 +8744,311 @@
           <a:bodyPr wrap="square" lIns="137160" tIns="109728" rIns="137160" bIns="91440" rtlCol="0" anchor="ctr"/>
           <a:lstStyle/>
           <a:p>
+            <a:pPr>
+              <a:spcAft>
+                <a:spcPts val="400"/>
+              </a:spcAft>
+            </a:pPr>
+            <a:r>
+              <a:rPr sz="1000" b="1" dirty="0">
+                <a:solidFill>
+                  <a:srgbClr val="3F8E5B"/>
+                </a:solidFill>
+                <a:latin typeface="Segoe UI"/>
+              </a:rPr>
+              <a:t>4</a:t>
+            </a:r>
+          </a:p>
+          <a:p>
+            <a:pPr>
+              <a:spcAft>
+                <a:spcPts val="600"/>
+              </a:spcAft>
+            </a:pPr>
+            <a:r>
+              <a:rPr sz="1600" b="1" dirty="0">
+                <a:solidFill>
+                  <a:srgbClr val="6B4F3A"/>
+                </a:solidFill>
+                <a:latin typeface="Segoe UI"/>
+              </a:rPr>
+              <a:t>Learn</a:t>
+            </a:r>
+          </a:p>
+          <a:p>
+            <a:r>
+              <a:rPr sz="1200" dirty="0">
+                <a:solidFill>
+                  <a:srgbClr val="6E665B"/>
+                </a:solidFill>
+                <a:latin typeface="Segoe UI"/>
+              </a:rPr>
+              <a:t>Learner completes lessons and quizzes.</a:t>
+            </a:r>
+          </a:p>
+        </p:txBody>
+      </p:sp>
+      <p:sp>
+        <p:nvSpPr>
+          <p:cNvPr id="9" name="Rounded Rectangle 8"/>
+          <p:cNvSpPr/>
+          <p:nvPr/>
+        </p:nvSpPr>
+        <p:spPr>
+          <a:xfrm>
+            <a:off x="8000999" y="2606040"/>
+            <a:ext cx="1691640" cy="1417320"/>
+          </a:xfrm>
+          <a:prstGeom prst="roundRect">
+            <a:avLst/>
+          </a:prstGeom>
+          <a:solidFill>
+            <a:srgbClr val="FFFFFF"/>
+          </a:solidFill>
+          <a:ln w="12700">
+            <a:solidFill>
+              <a:srgbClr val="E7E0D3"/>
+            </a:solidFill>
+          </a:ln>
+        </p:spPr>
+        <p:style>
+          <a:lnRef idx="1">
+            <a:schemeClr val="accent1"/>
+          </a:lnRef>
+          <a:fillRef idx="3">
+            <a:schemeClr val="accent1"/>
+          </a:fillRef>
+          <a:effectRef idx="2">
+            <a:schemeClr val="accent1"/>
+          </a:effectRef>
+          <a:fontRef idx="minor">
+            <a:schemeClr val="lt1"/>
+          </a:fontRef>
+        </p:style>
+        <p:txBody>
+          <a:bodyPr wrap="square" lIns="137160" tIns="109728" rIns="137160" bIns="91440" rtlCol="0" anchor="ctr"/>
+          <a:lstStyle/>
+          <a:p>
+            <a:pPr>
+              <a:spcAft>
+                <a:spcPts val="400"/>
+              </a:spcAft>
+            </a:pPr>
+            <a:r>
+              <a:rPr sz="1000" b="1" dirty="0">
+                <a:solidFill>
+                  <a:srgbClr val="3F8E5B"/>
+                </a:solidFill>
+                <a:latin typeface="Segoe UI"/>
+              </a:rPr>
+              <a:t>5</a:t>
+            </a:r>
+          </a:p>
+          <a:p>
+            <a:pPr>
+              <a:spcAft>
+                <a:spcPts val="600"/>
+              </a:spcAft>
+            </a:pPr>
+            <a:r>
+              <a:rPr sz="1600" b="1" dirty="0">
+                <a:solidFill>
+                  <a:srgbClr val="6B4F3A"/>
+                </a:solidFill>
+                <a:latin typeface="Segoe UI"/>
+              </a:rPr>
+              <a:t>Credential</a:t>
+            </a:r>
+          </a:p>
+          <a:p>
+            <a:r>
+              <a:rPr sz="1200" dirty="0">
+                <a:solidFill>
+                  <a:srgbClr val="6E665B"/>
+                </a:solidFill>
+                <a:latin typeface="Segoe UI"/>
+              </a:rPr>
+              <a:t>Platform issues signed W3C VC.</a:t>
+            </a:r>
+          </a:p>
+        </p:txBody>
+      </p:sp>
+      <p:sp>
+        <p:nvSpPr>
+          <p:cNvPr id="10" name="Rounded Rectangle 9"/>
+          <p:cNvSpPr/>
+          <p:nvPr/>
+        </p:nvSpPr>
+        <p:spPr>
+          <a:xfrm>
+            <a:off x="9875520" y="2606040"/>
+            <a:ext cx="1691640" cy="1417320"/>
+          </a:xfrm>
+          <a:prstGeom prst="roundRect">
+            <a:avLst/>
+          </a:prstGeom>
+          <a:solidFill>
+            <a:srgbClr val="FFFFFF"/>
+          </a:solidFill>
+          <a:ln w="12700">
+            <a:solidFill>
+              <a:srgbClr val="E7E0D3"/>
+            </a:solidFill>
+          </a:ln>
+        </p:spPr>
+        <p:style>
+          <a:lnRef idx="1">
+            <a:schemeClr val="accent1"/>
+          </a:lnRef>
+          <a:fillRef idx="3">
+            <a:schemeClr val="accent1"/>
+          </a:fillRef>
+          <a:effectRef idx="2">
+            <a:schemeClr val="accent1"/>
+          </a:effectRef>
+          <a:fontRef idx="minor">
+            <a:schemeClr val="lt1"/>
+          </a:fontRef>
+        </p:style>
+        <p:txBody>
+          <a:bodyPr wrap="square" lIns="137160" tIns="109728" rIns="137160" bIns="91440" rtlCol="0" anchor="ctr"/>
+          <a:lstStyle/>
+          <a:p>
+            <a:pPr>
+              <a:spcAft>
+                <a:spcPts val="400"/>
+              </a:spcAft>
+            </a:pPr>
+            <a:r>
+              <a:rPr sz="1000" b="1" dirty="0">
+                <a:solidFill>
+                  <a:srgbClr val="3F8E5B"/>
+                </a:solidFill>
+                <a:latin typeface="Segoe UI"/>
+              </a:rPr>
+              <a:t>6</a:t>
+            </a:r>
+          </a:p>
+          <a:p>
+            <a:pPr>
+              <a:spcAft>
+                <a:spcPts val="600"/>
+              </a:spcAft>
+            </a:pPr>
+            <a:r>
+              <a:rPr sz="1600" b="1" dirty="0">
+                <a:solidFill>
+                  <a:srgbClr val="6B4F3A"/>
+                </a:solidFill>
+                <a:latin typeface="Segoe UI"/>
+              </a:rPr>
+              <a:t>Anchor</a:t>
+            </a:r>
+          </a:p>
+          <a:p>
+            <a:r>
+              <a:rPr sz="1200" dirty="0">
+                <a:solidFill>
+                  <a:srgbClr val="6E665B"/>
+                </a:solidFill>
+                <a:latin typeface="Segoe UI"/>
+              </a:rPr>
+              <a:t>Hash recorded on Stellar </a:t>
+            </a:r>
+            <a:r>
+              <a:rPr sz="1200" dirty="0" err="1">
+                <a:solidFill>
+                  <a:srgbClr val="6E665B"/>
+                </a:solidFill>
+                <a:latin typeface="Segoe UI"/>
+              </a:rPr>
+              <a:t>Testnet</a:t>
+            </a:r>
+            <a:r>
+              <a:rPr sz="1200" dirty="0">
+                <a:solidFill>
+                  <a:srgbClr val="6E665B"/>
+                </a:solidFill>
+                <a:latin typeface="Segoe UI"/>
+              </a:rPr>
+              <a:t>.</a:t>
+            </a:r>
+          </a:p>
+        </p:txBody>
+      </p:sp>
+      <p:sp>
+        <p:nvSpPr>
+          <p:cNvPr id="11" name="Rounded Rectangle 10"/>
+          <p:cNvSpPr/>
+          <p:nvPr/>
+        </p:nvSpPr>
+        <p:spPr>
+          <a:xfrm>
+            <a:off x="685800" y="4572000"/>
+            <a:ext cx="10881360" cy="1234440"/>
+          </a:xfrm>
+          <a:prstGeom prst="roundRect">
+            <a:avLst/>
+          </a:prstGeom>
+          <a:solidFill>
+            <a:srgbClr val="FFFFFF"/>
+          </a:solidFill>
+          <a:ln w="12700">
+            <a:solidFill>
+              <a:srgbClr val="E7E0D3"/>
+            </a:solidFill>
+          </a:ln>
+        </p:spPr>
+        <p:style>
+          <a:lnRef idx="1">
+            <a:schemeClr val="accent1"/>
+          </a:lnRef>
+          <a:fillRef idx="3">
+            <a:schemeClr val="accent1"/>
+          </a:fillRef>
+          <a:effectRef idx="2">
+            <a:schemeClr val="accent1"/>
+          </a:effectRef>
+          <a:fontRef idx="minor">
+            <a:schemeClr val="lt1"/>
+          </a:fontRef>
+        </p:style>
+        <p:txBody>
+          <a:bodyPr wrap="square" lIns="137160" tIns="109728" rIns="137160" bIns="91440" rtlCol="0" anchor="ctr"/>
+          <a:lstStyle/>
+          <a:p>
             <a:pPr algn="ctr">
               <a:spcAft>
                 <a:spcPts val="600"/>
               </a:spcAft>
             </a:pPr>
             <a:r>
-              <a:rPr sz="2400" b="1" dirty="0">
+              <a:rPr sz="3200" b="1" dirty="0">
                 <a:solidFill>
                   <a:srgbClr val="6B4F3A"/>
                 </a:solidFill>
                 <a:latin typeface="Segoe UI"/>
               </a:rPr>
-              <a:t>Regulatory posture</a:t>
+              <a:t>Human in the loop</a:t>
             </a:r>
           </a:p>
           <a:p>
             <a:pPr algn="ctr"/>
             <a:r>
-              <a:rPr dirty="0" err="1">
+              <a:rPr sz="2400" dirty="0">
                 <a:solidFill>
                   <a:srgbClr val="6E665B"/>
                 </a:solidFill>
                 <a:latin typeface="Segoe UI"/>
               </a:rPr>
-              <a:t>Aniskwela</a:t>
-            </a:r>
-            <a:r>
-              <a:rPr dirty="0">
-                <a:solidFill>
-                  <a:srgbClr val="6E665B"/>
-                </a:solidFill>
-                <a:latin typeface="Segoe UI"/>
-              </a:rPr>
-              <a:t> is not a money transmitter. Credentials carry proof of learning.</a:t>
-            </a:r>
-            <a:br>
-              <a:rPr lang="en-US" dirty="0">
-                <a:solidFill>
-                  <a:srgbClr val="6E665B"/>
-                </a:solidFill>
-                <a:latin typeface="Segoe UI"/>
-              </a:rPr>
-            </a:br>
-            <a:r>
-              <a:rPr dirty="0">
-                <a:solidFill>
-                  <a:srgbClr val="6E665B"/>
-                </a:solidFill>
-                <a:latin typeface="Segoe UI"/>
-              </a:rPr>
-              <a:t>Grants use simulated disbursement until a VASP partner executes payout.</a:t>
-            </a:r>
-          </a:p>
-        </p:txBody>
-      </p:sp>
-      <p:sp>
-        <p:nvSpPr>
-          <p:cNvPr id="9" name="TextBox 8"/>
+              <a:t>Mandatory teacher review before any course goes live.</a:t>
+            </a:r>
+          </a:p>
+        </p:txBody>
+      </p:sp>
+      <p:sp>
+        <p:nvSpPr>
+          <p:cNvPr id="13" name="TextBox 12"/>
           <p:cNvSpPr txBox="1"/>
           <p:nvPr/>
         </p:nvSpPr>
@@ -8346,7 +9083,7 @@
       </p:sp>
       <p:sp>
         <p:nvSpPr>
-          <p:cNvPr id="10" name="TextBox 9"/>
+          <p:cNvPr id="14" name="TextBox 13"/>
           <p:cNvSpPr txBox="1"/>
           <p:nvPr/>
         </p:nvSpPr>
@@ -8368,13 +9105,7 @@
           <a:p>
             <a:pPr algn="r"/>
             <a:r>
-              <a:rPr sz="1000" b="0">
-                <a:solidFill>
-                  <a:srgbClr val="6E665B"/>
-                </a:solidFill>
-                <a:latin typeface="Segoe UI"/>
-              </a:rPr>
-              <a:t>Grant partner deck  ·  7/10</a:t>
+              <a:t>Grant partner deck  ·  7/11</a:t>
             </a:r>
           </a:p>
         </p:txBody>
@@ -8442,7 +9173,7 @@
                 </a:solidFill>
                 <a:latin typeface="Segoe UI"/>
               </a:rPr>
-              <a:t>FOR FUNDERS &amp; PARTNERS</a:t>
+              <a:t>TRUST LAYER</a:t>
             </a:r>
           </a:p>
         </p:txBody>
@@ -8456,7 +9187,7 @@
         <p:spPr>
           <a:xfrm>
             <a:off x="685800" y="868680"/>
-            <a:ext cx="10515600" cy="523220"/>
+            <a:ext cx="10515600" cy="822960"/>
           </a:xfrm>
           <a:prstGeom prst="rect">
             <a:avLst/>
@@ -8471,13 +9202,13 @@
           <a:p>
             <a:pPr algn="l"/>
             <a:r>
-              <a:rPr sz="2800" b="1" dirty="0">
+              <a:rPr sz="3200" b="1">
                 <a:solidFill>
                   <a:srgbClr val="6B4F3A"/>
                 </a:solidFill>
                 <a:latin typeface="Segoe UI"/>
               </a:rPr>
-              <a:t>Target grants to consistent learners. Audit every decision.</a:t>
+              <a:t>Merit ledger plus verifiable credentials.</a:t>
             </a:r>
           </a:p>
         </p:txBody>
@@ -8512,7 +9243,7 @@
                 </a:solidFill>
                 <a:latin typeface="Segoe UI"/>
               </a:rPr>
-              <a:t>Aniskwela decides eligibility. A licensed VASP moves money. You get exports your donors can read.</a:t>
+              <a:t>Open standards. Hash-only on-chain. A public verifier anyone can use without an account.</a:t>
             </a:r>
           </a:p>
         </p:txBody>
@@ -8526,7 +9257,7 @@
         <p:spPr>
           <a:xfrm>
             <a:off x="685800" y="2423160"/>
-            <a:ext cx="3383280" cy="2286000"/>
+            <a:ext cx="3383280" cy="2194560"/>
           </a:xfrm>
           <a:prstGeom prst="roundRect">
             <a:avLst/>
@@ -8558,30 +9289,46 @@
           <a:bodyPr wrap="square" lIns="137160" tIns="109728" rIns="137160" bIns="91440" rtlCol="0" anchor="t"/>
           <a:lstStyle/>
           <a:p>
-            <a:pPr algn="ctr">
+            <a:pPr>
+              <a:spcAft>
+                <a:spcPts val="400"/>
+              </a:spcAft>
+            </a:pPr>
+            <a:r>
+              <a:rPr sz="1200" b="1" dirty="0">
+                <a:solidFill>
+                  <a:srgbClr val="C8852A"/>
+                </a:solidFill>
+                <a:latin typeface="Segoe UI"/>
+              </a:rPr>
+              <a:t>Roadmap</a:t>
+            </a:r>
+          </a:p>
+          <a:p>
+            <a:pPr>
               <a:spcAft>
                 <a:spcPts val="600"/>
               </a:spcAft>
             </a:pPr>
             <a:r>
-              <a:rPr sz="2400" b="1">
+              <a:rPr sz="2400" b="1" dirty="0">
                 <a:solidFill>
                   <a:srgbClr val="6B4F3A"/>
                 </a:solidFill>
                 <a:latin typeface="Segoe UI"/>
               </a:rPr>
-              <a:t>Set criteria</a:t>
-            </a:r>
-          </a:p>
-          <a:p>
-            <a:r>
-              <a:rPr>
+              <a:t>Merit ledger</a:t>
+            </a:r>
+          </a:p>
+          <a:p>
+            <a:r>
+              <a:rPr dirty="0">
                 <a:solidFill>
                   <a:srgbClr val="6E665B"/>
                 </a:solidFill>
                 <a:latin typeface="Segoe UI"/>
               </a:rPr>
-              <a:t>Example: "Agriculture track, ≥30,000 XP, Consistent Learner badge." Criteria stored as structured JSON.</a:t>
+              <a:t>Append-only XP events. Badges for consistency. Readable by funders when setting eligibility rules.</a:t>
             </a:r>
           </a:p>
         </p:txBody>
@@ -8595,7 +9342,7 @@
         <p:spPr>
           <a:xfrm>
             <a:off x="4343400" y="2423160"/>
-            <a:ext cx="3383280" cy="2286000"/>
+            <a:ext cx="3383280" cy="2194560"/>
           </a:xfrm>
           <a:prstGeom prst="roundRect">
             <a:avLst/>
@@ -8627,7 +9374,23 @@
           <a:bodyPr wrap="square" lIns="137160" tIns="109728" rIns="137160" bIns="91440" rtlCol="0" anchor="t"/>
           <a:lstStyle/>
           <a:p>
-            <a:pPr algn="ctr">
+            <a:pPr>
+              <a:spcAft>
+                <a:spcPts val="400"/>
+              </a:spcAft>
+            </a:pPr>
+            <a:r>
+              <a:rPr sz="1200" b="1" dirty="0">
+                <a:solidFill>
+                  <a:srgbClr val="C8852A"/>
+                </a:solidFill>
+                <a:latin typeface="Segoe UI"/>
+              </a:rPr>
+              <a:t>Roadmap</a:t>
+            </a:r>
+          </a:p>
+          <a:p>
+            <a:pPr>
               <a:spcAft>
                 <a:spcPts val="600"/>
               </a:spcAft>
@@ -8639,7 +9402,7 @@
                 </a:solidFill>
                 <a:latin typeface="Segoe UI"/>
               </a:rPr>
-              <a:t>Preview eligible list</a:t>
+              <a:t>W3C VC + OB 3.0</a:t>
             </a:r>
           </a:p>
           <a:p>
@@ -8650,7 +9413,7 @@
                 </a:solidFill>
                 <a:latin typeface="Segoe UI"/>
               </a:rPr>
-              <a:t>Server-side query against merit ledger and credentials. No self-reported forms.</a:t>
+              <a:t>Portable credential any OB 3.0 verifier can check. Learner name on the card, not on the chain.</a:t>
             </a:r>
           </a:p>
         </p:txBody>
@@ -8664,7 +9427,7 @@
         <p:spPr>
           <a:xfrm>
             <a:off x="8001000" y="2423160"/>
-            <a:ext cx="3520440" cy="2286000"/>
+            <a:ext cx="3520440" cy="2194560"/>
           </a:xfrm>
           <a:prstGeom prst="roundRect">
             <a:avLst/>
@@ -8698,6 +9461,22 @@
           <a:p>
             <a:pPr>
               <a:spcAft>
+                <a:spcPts val="400"/>
+              </a:spcAft>
+            </a:pPr>
+            <a:r>
+              <a:rPr sz="1200" b="1" dirty="0">
+                <a:solidFill>
+                  <a:srgbClr val="C8852A"/>
+                </a:solidFill>
+                <a:latin typeface="Segoe UI"/>
+              </a:rPr>
+              <a:t>Roadmap</a:t>
+            </a:r>
+          </a:p>
+          <a:p>
+            <a:pPr>
+              <a:spcAft>
                 <a:spcPts val="600"/>
               </a:spcAft>
             </a:pPr>
@@ -8708,7 +9487,7 @@
                 </a:solidFill>
                 <a:latin typeface="Segoe UI"/>
               </a:rPr>
-              <a:t>Simulate &amp; export</a:t>
+              <a:t>Public verifier</a:t>
             </a:r>
           </a:p>
           <a:p>
@@ -8719,21 +9498,117 @@
                 </a:solidFill>
                 <a:latin typeface="Segoe UI"/>
               </a:rPr>
-              <a:t>MVP disbursement is clearly labelled simulation. Audit report export for program officers.</a:t>
-            </a:r>
-          </a:p>
-        </p:txBody>
-      </p:sp>
-      <p:sp>
-        <p:nvSpPr>
-          <p:cNvPr id="8" name="TextBox 7"/>
+              <a:t>URL or QR → valid or invalid, with course, date, and score. No login required.</a:t>
+            </a:r>
+          </a:p>
+        </p:txBody>
+      </p:sp>
+      <p:sp>
+        <p:nvSpPr>
+          <p:cNvPr id="8" name="Rounded Rectangle 7"/>
+          <p:cNvSpPr/>
+          <p:nvPr/>
+        </p:nvSpPr>
+        <p:spPr>
+          <a:xfrm>
+            <a:off x="685800" y="4892040"/>
+            <a:ext cx="10835640" cy="1051560"/>
+          </a:xfrm>
+          <a:prstGeom prst="roundRect">
+            <a:avLst/>
+          </a:prstGeom>
+          <a:solidFill>
+            <a:srgbClr val="FFFFFF"/>
+          </a:solidFill>
+          <a:ln w="12700">
+            <a:solidFill>
+              <a:srgbClr val="E7E0D3"/>
+            </a:solidFill>
+          </a:ln>
+        </p:spPr>
+        <p:style>
+          <a:lnRef idx="1">
+            <a:schemeClr val="accent1"/>
+          </a:lnRef>
+          <a:fillRef idx="3">
+            <a:schemeClr val="accent1"/>
+          </a:fillRef>
+          <a:effectRef idx="2">
+            <a:schemeClr val="accent1"/>
+          </a:effectRef>
+          <a:fontRef idx="minor">
+            <a:schemeClr val="lt1"/>
+          </a:fontRef>
+        </p:style>
+        <p:txBody>
+          <a:bodyPr wrap="square" lIns="137160" tIns="109728" rIns="137160" bIns="91440" rtlCol="0" anchor="ctr"/>
+          <a:lstStyle/>
+          <a:p>
+            <a:pPr algn="ctr">
+              <a:spcAft>
+                <a:spcPts val="600"/>
+              </a:spcAft>
+            </a:pPr>
+            <a:r>
+              <a:rPr sz="2400" b="1" dirty="0">
+                <a:solidFill>
+                  <a:srgbClr val="6B4F3A"/>
+                </a:solidFill>
+                <a:latin typeface="Segoe UI"/>
+              </a:rPr>
+              <a:t>Regulatory posture</a:t>
+            </a:r>
+          </a:p>
+          <a:p>
+            <a:pPr algn="ctr"/>
+            <a:r>
+              <a:rPr dirty="0" err="1">
+                <a:solidFill>
+                  <a:srgbClr val="6E665B"/>
+                </a:solidFill>
+                <a:latin typeface="Segoe UI"/>
+              </a:rPr>
+              <a:t>Aniskwela</a:t>
+            </a:r>
+            <a:r>
+              <a:rPr dirty="0">
+                <a:solidFill>
+                  <a:srgbClr val="6E665B"/>
+                </a:solidFill>
+                <a:latin typeface="Segoe UI"/>
+              </a:rPr>
+              <a:t> is not a money transmitter. Credentials carry proof of learning.</a:t>
+            </a:r>
+            <a:br>
+              <a:rPr lang="en-US" dirty="0">
+                <a:solidFill>
+                  <a:srgbClr val="6E665B"/>
+                </a:solidFill>
+                <a:latin typeface="Segoe UI"/>
+              </a:rPr>
+            </a:br>
+            <a:r>
+              <a:rPr dirty="0">
+                <a:solidFill>
+                  <a:srgbClr val="6E665B"/>
+                </a:solidFill>
+                <a:latin typeface="Segoe UI"/>
+              </a:rPr>
+              <a:t>Grants use simulated disbursement until a VASP partner executes payout.</a:t>
+            </a:r>
+          </a:p>
+        </p:txBody>
+      </p:sp>
+      <p:sp>
+        <p:nvSpPr>
+          <p:cNvPr id="9" name="TextBox 8"/>
           <p:cNvSpPr txBox="1"/>
           <p:nvPr/>
         </p:nvSpPr>
         <p:spPr>
           <a:xfrm>
-            <a:off x="685800" y="4983480"/>
-            <a:ext cx="10835640" cy="822960"/>
+            <a:off x="548640" y="6446520"/>
+            <a:ext cx="4572000" cy="320040"/>
           </a:xfrm>
           <a:prstGeom prst="rect">
             <a:avLst/>
@@ -8748,27 +9623,27 @@
           <a:p>
             <a:pPr algn="l"/>
             <a:r>
-              <a:rPr sz="1500" b="0">
-                <a:solidFill>
-                  <a:srgbClr val="241F1A"/>
-                </a:solidFill>
-                <a:latin typeface="Segoe UI"/>
-              </a:rPr>
-              <a:t>We are looking for one foundation or agency partner to co-design the first pilot program criteria with real farmers and extension teachers in your network.</a:t>
-            </a:r>
-          </a:p>
-        </p:txBody>
-      </p:sp>
-      <p:sp>
-        <p:nvSpPr>
-          <p:cNvPr id="9" name="TextBox 8"/>
+              <a:rPr sz="1000" b="0">
+                <a:solidFill>
+                  <a:srgbClr val="6E665B"/>
+                </a:solidFill>
+                <a:latin typeface="Segoe UI"/>
+              </a:rPr>
+              <a:t>ANISKWELA  ·  Axon Enjin</a:t>
+            </a:r>
+          </a:p>
+        </p:txBody>
+      </p:sp>
+      <p:sp>
+        <p:nvSpPr>
+          <p:cNvPr id="10" name="TextBox 9"/>
           <p:cNvSpPr txBox="1"/>
           <p:nvPr/>
         </p:nvSpPr>
         <p:spPr>
           <a:xfrm>
-            <a:off x="548640" y="6446520"/>
-            <a:ext cx="4572000" cy="320040"/>
+            <a:off x="9601200" y="6446520"/>
+            <a:ext cx="2103120" cy="320040"/>
           </a:xfrm>
           <a:prstGeom prst="rect">
             <a:avLst/>
@@ -8781,50 +9656,9 @@
           </a:bodyPr>
           <a:lstStyle/>
           <a:p>
-            <a:pPr algn="l"/>
-            <a:r>
-              <a:rPr sz="1000" b="0">
-                <a:solidFill>
-                  <a:srgbClr val="6E665B"/>
-                </a:solidFill>
-                <a:latin typeface="Segoe UI"/>
-              </a:rPr>
-              <a:t>ANISKWELA  ·  Axon Enjin</a:t>
-            </a:r>
-          </a:p>
-        </p:txBody>
-      </p:sp>
-      <p:sp>
-        <p:nvSpPr>
-          <p:cNvPr id="10" name="TextBox 9"/>
-          <p:cNvSpPr txBox="1"/>
-          <p:nvPr/>
-        </p:nvSpPr>
-        <p:spPr>
-          <a:xfrm>
-            <a:off x="9601200" y="6446520"/>
-            <a:ext cx="2103120" cy="320040"/>
-          </a:xfrm>
-          <a:prstGeom prst="rect">
-            <a:avLst/>
-          </a:prstGeom>
-          <a:noFill/>
-        </p:spPr>
-        <p:txBody>
-          <a:bodyPr wrap="square" anchor="t">
-            <a:spAutoFit/>
-          </a:bodyPr>
-          <a:lstStyle/>
-          <a:p>
             <a:pPr algn="r"/>
             <a:r>
-              <a:rPr sz="1000" b="0">
-                <a:solidFill>
-                  <a:srgbClr val="6E665B"/>
-                </a:solidFill>
-                <a:latin typeface="Segoe UI"/>
-              </a:rPr>
-              <a:t>Grant partner deck  ·  8/10</a:t>
+              <a:t>Grant partner deck  ·  8/11</a:t>
             </a:r>
           </a:p>
         </p:txBody>
@@ -8892,7 +9726,7 @@
                 </a:solidFill>
                 <a:latin typeface="Segoe UI"/>
               </a:rPr>
-              <a:t>TECHNOLOGY</a:t>
+              <a:t>FOR FUNDERS &amp; PARTNERS</a:t>
             </a:r>
           </a:p>
         </p:txBody>
@@ -8906,7 +9740,7 @@
         <p:spPr>
           <a:xfrm>
             <a:off x="685800" y="868680"/>
-            <a:ext cx="10515600" cy="822960"/>
+            <a:ext cx="10515600" cy="523220"/>
           </a:xfrm>
           <a:prstGeom prst="rect">
             <a:avLst/>
@@ -8921,13 +9755,13 @@
           <a:p>
             <a:pPr algn="l"/>
             <a:r>
-              <a:rPr sz="3200" b="1">
+              <a:rPr sz="2800" b="1" dirty="0">
                 <a:solidFill>
                   <a:srgbClr val="6B4F3A"/>
                 </a:solidFill>
                 <a:latin typeface="Segoe UI"/>
               </a:rPr>
-              <a:t>Honest stack for rural scale.</a:t>
+              <a:t>Target grants to consistent learners. Audit every decision.</a:t>
             </a:r>
           </a:p>
         </p:txBody>
@@ -8962,7 +9796,7 @@
                 </a:solidFill>
                 <a:latin typeface="Segoe UI"/>
               </a:rPr>
-              <a:t>Next.js 16 on Vercel. Supabase with RLS on every table. Azure AI Foundry. Stellar for hash anchoring only.</a:t>
+              <a:t>Aniskwela decides eligibility. A licensed VASP moves money. You get exports your donors can read.</a:t>
             </a:r>
           </a:p>
         </p:txBody>
@@ -8976,7 +9810,7 @@
         <p:spPr>
           <a:xfrm>
             <a:off x="685800" y="2423160"/>
-            <a:ext cx="5029200" cy="868680"/>
+            <a:ext cx="3383280" cy="2286000"/>
           </a:xfrm>
           <a:prstGeom prst="roundRect">
             <a:avLst/>
@@ -9005,7 +9839,7 @@
           </a:fontRef>
         </p:style>
         <p:txBody>
-          <a:bodyPr wrap="square" lIns="137160" tIns="109728" rIns="137160" bIns="91440" rtlCol="0" anchor="ctr"/>
+          <a:bodyPr wrap="square" lIns="137160" tIns="109728" rIns="137160" bIns="91440" rtlCol="0" anchor="t"/>
           <a:lstStyle/>
           <a:p>
             <a:pPr algn="ctr">
@@ -9014,25 +9848,24 @@
               </a:spcAft>
             </a:pPr>
             <a:r>
-              <a:rPr sz="2000" b="1">
+              <a:rPr sz="2400" b="1">
                 <a:solidFill>
                   <a:srgbClr val="6B4F3A"/>
                 </a:solidFill>
                 <a:latin typeface="Segoe UI"/>
               </a:rPr>
-              <a:t>Framework: Next.js 16.2 App Router</a:t>
-            </a:r>
-          </a:p>
-          <a:p>
-            <a:pPr algn="ctr"/>
-            <a:r>
-              <a:rPr sz="1600">
+              <a:t>Set criteria</a:t>
+            </a:r>
+          </a:p>
+          <a:p>
+            <a:r>
+              <a:rPr>
                 <a:solidFill>
                   <a:srgbClr val="6E665B"/>
                 </a:solidFill>
                 <a:latin typeface="Segoe UI"/>
               </a:rPr>
-              <a:t>Cache Components on public reads</a:t>
+              <a:t>Example: "Agriculture track, ≥30,000 XP, Consistent Learner badge." Criteria stored as structured JSON.</a:t>
             </a:r>
           </a:p>
         </p:txBody>
@@ -9045,8 +9878,8 @@
         </p:nvSpPr>
         <p:spPr>
           <a:xfrm>
-            <a:off x="685800" y="3383280"/>
-            <a:ext cx="5029200" cy="868680"/>
+            <a:off x="4343400" y="2423160"/>
+            <a:ext cx="3383280" cy="2286000"/>
           </a:xfrm>
           <a:prstGeom prst="roundRect">
             <a:avLst/>
@@ -9075,7 +9908,7 @@
           </a:fontRef>
         </p:style>
         <p:txBody>
-          <a:bodyPr wrap="square" lIns="137160" tIns="109728" rIns="137160" bIns="91440" rtlCol="0" anchor="ctr"/>
+          <a:bodyPr wrap="square" lIns="137160" tIns="109728" rIns="137160" bIns="91440" rtlCol="0" anchor="t"/>
           <a:lstStyle/>
           <a:p>
             <a:pPr algn="ctr">
@@ -9084,25 +9917,24 @@
               </a:spcAft>
             </a:pPr>
             <a:r>
-              <a:rPr sz="2000" b="1">
+              <a:rPr sz="2400" b="1" dirty="0">
                 <a:solidFill>
                   <a:srgbClr val="6B4F3A"/>
                 </a:solidFill>
                 <a:latin typeface="Segoe UI"/>
               </a:rPr>
-              <a:t>Data: Supabase Postgres</a:t>
-            </a:r>
-          </a:p>
-          <a:p>
-            <a:pPr algn="ctr"/>
-            <a:r>
-              <a:rPr sz="1600">
+              <a:t>Preview eligible list</a:t>
+            </a:r>
+          </a:p>
+          <a:p>
+            <a:r>
+              <a:rPr dirty="0">
                 <a:solidFill>
                   <a:srgbClr val="6E665B"/>
                 </a:solidFill>
                 <a:latin typeface="Segoe UI"/>
               </a:rPr>
-              <a:t>9 tables, RLS, auth SSR</a:t>
+              <a:t>Server-side query against merit ledger and credentials. No self-reported forms.</a:t>
             </a:r>
           </a:p>
         </p:txBody>
@@ -9115,8 +9947,8 @@
         </p:nvSpPr>
         <p:spPr>
           <a:xfrm>
-            <a:off x="685800" y="4343400"/>
-            <a:ext cx="5029200" cy="868680"/>
+            <a:off x="8001000" y="2423160"/>
+            <a:ext cx="3520440" cy="2286000"/>
           </a:xfrm>
           <a:prstGeom prst="roundRect">
             <a:avLst/>
@@ -9145,104 +9977,68 @@
           </a:fontRef>
         </p:style>
         <p:txBody>
-          <a:bodyPr wrap="square" lIns="137160" tIns="109728" rIns="137160" bIns="91440" rtlCol="0" anchor="ctr"/>
-          <a:lstStyle/>
-          <a:p>
-            <a:pPr algn="ctr">
+          <a:bodyPr wrap="square" lIns="137160" tIns="109728" rIns="137160" bIns="91440" rtlCol="0" anchor="t"/>
+          <a:lstStyle/>
+          <a:p>
+            <a:pPr>
               <a:spcAft>
                 <a:spcPts val="600"/>
               </a:spcAft>
             </a:pPr>
             <a:r>
-              <a:rPr sz="2000" b="1">
+              <a:rPr sz="2400" b="1" dirty="0">
                 <a:solidFill>
                   <a:srgbClr val="6B4F3A"/>
                 </a:solidFill>
                 <a:latin typeface="Segoe UI"/>
               </a:rPr>
-              <a:t>AI: Azure AI Foundry</a:t>
-            </a:r>
-          </a:p>
-          <a:p>
-            <a:pPr algn="ctr"/>
-            <a:r>
-              <a:rPr sz="1600">
+              <a:t>Simulate &amp; export</a:t>
+            </a:r>
+          </a:p>
+          <a:p>
+            <a:r>
+              <a:rPr dirty="0">
                 <a:solidFill>
                   <a:srgbClr val="6E665B"/>
                 </a:solidFill>
                 <a:latin typeface="Segoe UI"/>
               </a:rPr>
-              <a:t>gpt-5.4 course gen · gpt-5.4-mini repair</a:t>
-            </a:r>
-          </a:p>
-        </p:txBody>
-      </p:sp>
-      <p:sp>
-        <p:nvSpPr>
-          <p:cNvPr id="8" name="Rounded Rectangle 7"/>
-          <p:cNvSpPr/>
+              <a:t>MVP disbursement is clearly labelled simulation. Audit report export for program officers.</a:t>
+            </a:r>
+          </a:p>
+        </p:txBody>
+      </p:sp>
+      <p:sp>
+        <p:nvSpPr>
+          <p:cNvPr id="8" name="TextBox 7"/>
+          <p:cNvSpPr txBox="1"/>
           <p:nvPr/>
         </p:nvSpPr>
         <p:spPr>
           <a:xfrm>
-            <a:off x="685800" y="5303520"/>
-            <a:ext cx="5029200" cy="868680"/>
-          </a:xfrm>
-          <a:prstGeom prst="roundRect">
-            <a:avLst/>
-          </a:prstGeom>
-          <a:solidFill>
-            <a:srgbClr val="FFFFFF"/>
-          </a:solidFill>
-          <a:ln w="12700">
-            <a:solidFill>
-              <a:srgbClr val="E7E0D3"/>
-            </a:solidFill>
-          </a:ln>
-        </p:spPr>
-        <p:style>
-          <a:lnRef idx="1">
-            <a:schemeClr val="accent1"/>
-          </a:lnRef>
-          <a:fillRef idx="3">
-            <a:schemeClr val="accent1"/>
-          </a:fillRef>
-          <a:effectRef idx="2">
-            <a:schemeClr val="accent1"/>
-          </a:effectRef>
-          <a:fontRef idx="minor">
-            <a:schemeClr val="lt1"/>
-          </a:fontRef>
-        </p:style>
-        <p:txBody>
-          <a:bodyPr wrap="square" lIns="137160" tIns="109728" rIns="137160" bIns="91440" rtlCol="0" anchor="ctr"/>
-          <a:lstStyle/>
-          <a:p>
-            <a:pPr algn="ctr">
-              <a:spcAft>
-                <a:spcPts val="600"/>
-              </a:spcAft>
-            </a:pPr>
-            <a:r>
-              <a:rPr sz="2000" b="1">
-                <a:solidFill>
-                  <a:srgbClr val="6B4F3A"/>
-                </a:solidFill>
-                <a:latin typeface="Segoe UI"/>
-              </a:rPr>
-              <a:t>Chain: Stellar Testnet</a:t>
-            </a:r>
-          </a:p>
-          <a:p>
-            <a:pPr algn="ctr"/>
-            <a:r>
-              <a:rPr sz="1600">
-                <a:solidFill>
-                  <a:srgbClr val="6E665B"/>
-                </a:solidFill>
-                <a:latin typeface="Segoe UI"/>
-              </a:rPr>
-              <a:t>Hash-only memo · mock fallback flag</a:t>
+            <a:off x="685800" y="4983480"/>
+            <a:ext cx="10835640" cy="822960"/>
+          </a:xfrm>
+          <a:prstGeom prst="rect">
+            <a:avLst/>
+          </a:prstGeom>
+          <a:noFill/>
+        </p:spPr>
+        <p:txBody>
+          <a:bodyPr wrap="square" anchor="t">
+            <a:spAutoFit/>
+          </a:bodyPr>
+          <a:lstStyle/>
+          <a:p>
+            <a:pPr algn="l"/>
+            <a:r>
+              <a:rPr sz="1500" b="0">
+                <a:solidFill>
+                  <a:srgbClr val="241F1A"/>
+                </a:solidFill>
+                <a:latin typeface="Segoe UI"/>
+              </a:rPr>
+              <a:t>We are looking for one foundation or agency partner to co-design the first pilot program criteria with real farmers and extension teachers in your network.</a:t>
             </a:r>
           </a:p>
         </p:txBody>
@@ -9255,8 +10051,8 @@
         </p:nvSpPr>
         <p:spPr>
           <a:xfrm>
-            <a:off x="6263640" y="2514600"/>
-            <a:ext cx="5257800" cy="2923877"/>
+            <a:off x="548640" y="6446520"/>
+            <a:ext cx="4572000" cy="320040"/>
           </a:xfrm>
           <a:prstGeom prst="rect">
             <a:avLst/>
@@ -9264,155 +10060,20 @@
           <a:noFill/>
         </p:spPr>
         <p:txBody>
-          <a:bodyPr wrap="square">
+          <a:bodyPr wrap="square" anchor="t">
             <a:spAutoFit/>
           </a:bodyPr>
           <a:lstStyle/>
           <a:p>
-            <a:pPr>
-              <a:spcAft>
-                <a:spcPts val="800"/>
-              </a:spcAft>
-            </a:pPr>
-            <a:r>
-              <a:rPr dirty="0">
-                <a:solidFill>
-                  <a:srgbClr val="241F1A"/>
-                </a:solidFill>
-                <a:latin typeface="Segoe UI"/>
-              </a:rPr>
-              <a:t>Initial JS ≤ 220 KB </a:t>
-            </a:r>
-            <a:r>
-              <a:rPr dirty="0" err="1">
-                <a:solidFill>
-                  <a:srgbClr val="241F1A"/>
-                </a:solidFill>
-                <a:latin typeface="Segoe UI"/>
-              </a:rPr>
-              <a:t>gzipped</a:t>
-            </a:r>
-            <a:br>
-              <a:rPr lang="en-US" dirty="0">
-                <a:solidFill>
-                  <a:srgbClr val="241F1A"/>
-                </a:solidFill>
-                <a:latin typeface="Segoe UI"/>
-              </a:rPr>
-            </a:br>
-            <a:r>
-              <a:rPr dirty="0">
-                <a:solidFill>
-                  <a:srgbClr val="241F1A"/>
-                </a:solidFill>
-                <a:latin typeface="Segoe UI"/>
-              </a:rPr>
-              <a:t>(measured ≈174 KB today)</a:t>
-            </a:r>
-          </a:p>
-          <a:p>
-            <a:pPr>
-              <a:spcAft>
-                <a:spcPts val="800"/>
-              </a:spcAft>
-            </a:pPr>
-            <a:endParaRPr lang="en-US" dirty="0">
-              <a:solidFill>
-                <a:srgbClr val="241F1A"/>
-              </a:solidFill>
-              <a:latin typeface="Segoe UI"/>
-            </a:endParaRPr>
-          </a:p>
-          <a:p>
-            <a:pPr>
-              <a:spcAft>
-                <a:spcPts val="800"/>
-              </a:spcAft>
-            </a:pPr>
-            <a:r>
-              <a:rPr dirty="0">
-                <a:solidFill>
-                  <a:srgbClr val="241F1A"/>
-                </a:solidFill>
-                <a:latin typeface="Segoe UI"/>
-              </a:rPr>
-              <a:t>Images ≤ 80 KB </a:t>
-            </a:r>
-            <a:r>
-              <a:rPr dirty="0" err="1">
-                <a:solidFill>
-                  <a:srgbClr val="241F1A"/>
-                </a:solidFill>
-                <a:latin typeface="Segoe UI"/>
-              </a:rPr>
-              <a:t>WebP</a:t>
-            </a:r>
-            <a:r>
-              <a:rPr dirty="0">
-                <a:solidFill>
-                  <a:srgbClr val="241F1A"/>
-                </a:solidFill>
-                <a:latin typeface="Segoe UI"/>
-              </a:rPr>
-              <a:t> on first load</a:t>
-            </a:r>
-          </a:p>
-          <a:p>
-            <a:pPr>
-              <a:spcAft>
-                <a:spcPts val="800"/>
-              </a:spcAft>
-            </a:pPr>
-            <a:endParaRPr lang="en-US" dirty="0">
-              <a:solidFill>
-                <a:srgbClr val="241F1A"/>
-              </a:solidFill>
-              <a:latin typeface="Segoe UI"/>
-            </a:endParaRPr>
-          </a:p>
-          <a:p>
-            <a:pPr>
-              <a:spcAft>
-                <a:spcPts val="800"/>
-              </a:spcAft>
-            </a:pPr>
-            <a:r>
-              <a:rPr dirty="0">
-                <a:solidFill>
-                  <a:srgbClr val="241F1A"/>
-                </a:solidFill>
-                <a:latin typeface="Segoe UI"/>
-              </a:rPr>
-              <a:t>Core content target &lt; 5 s on 3G</a:t>
-            </a:r>
-          </a:p>
-          <a:p>
-            <a:pPr>
-              <a:spcAft>
-                <a:spcPts val="800"/>
-              </a:spcAft>
-            </a:pPr>
-            <a:endParaRPr lang="en-US" dirty="0">
-              <a:solidFill>
-                <a:srgbClr val="241F1A"/>
-              </a:solidFill>
-              <a:latin typeface="Segoe UI"/>
-            </a:endParaRPr>
-          </a:p>
-          <a:p>
-            <a:pPr>
-              <a:spcAft>
-                <a:spcPts val="800"/>
-              </a:spcAft>
-            </a:pPr>
-            <a:r>
-              <a:rPr dirty="0">
-                <a:solidFill>
-                  <a:srgbClr val="241F1A"/>
-                </a:solidFill>
-                <a:latin typeface="Segoe UI"/>
-              </a:rPr>
-              <a:t>System fonts only · light theme · EN + Filipino</a:t>
+            <a:pPr algn="l"/>
+            <a:r>
+              <a:rPr sz="1000" b="0">
+                <a:solidFill>
+                  <a:srgbClr val="6E665B"/>
+                </a:solidFill>
+                <a:latin typeface="Segoe UI"/>
+              </a:rPr>
+              <a:t>ANISKWELA  ·  Axon Enjin</a:t>
             </a:r>
           </a:p>
         </p:txBody>
@@ -9425,8 +10086,8 @@
         </p:nvSpPr>
         <p:spPr>
           <a:xfrm>
-            <a:off x="548640" y="6446520"/>
-            <a:ext cx="4572000" cy="320040"/>
+            <a:off x="9601200" y="6446520"/>
+            <a:ext cx="2103120" cy="320040"/>
           </a:xfrm>
           <a:prstGeom prst="rect">
             <a:avLst/>
@@ -9439,50 +10100,9 @@
           </a:bodyPr>
           <a:lstStyle/>
           <a:p>
-            <a:pPr algn="l"/>
-            <a:r>
-              <a:rPr sz="1000" b="0">
-                <a:solidFill>
-                  <a:srgbClr val="6E665B"/>
-                </a:solidFill>
-                <a:latin typeface="Segoe UI"/>
-              </a:rPr>
-              <a:t>ANISKWELA  ·  Axon Enjin</a:t>
-            </a:r>
-          </a:p>
-        </p:txBody>
-      </p:sp>
-      <p:sp>
-        <p:nvSpPr>
-          <p:cNvPr id="11" name="TextBox 10"/>
-          <p:cNvSpPr txBox="1"/>
-          <p:nvPr/>
-        </p:nvSpPr>
-        <p:spPr>
-          <a:xfrm>
-            <a:off x="9601200" y="6446520"/>
-            <a:ext cx="2103120" cy="320040"/>
-          </a:xfrm>
-          <a:prstGeom prst="rect">
-            <a:avLst/>
-          </a:prstGeom>
-          <a:noFill/>
-        </p:spPr>
-        <p:txBody>
-          <a:bodyPr wrap="square" anchor="t">
-            <a:spAutoFit/>
-          </a:bodyPr>
-          <a:lstStyle/>
-          <a:p>
             <a:pPr algn="r"/>
             <a:r>
-              <a:rPr sz="1000" b="0">
-                <a:solidFill>
-                  <a:srgbClr val="6E665B"/>
-                </a:solidFill>
-                <a:latin typeface="Segoe UI"/>
-              </a:rPr>
-              <a:t>Grant partner deck  ·  9/10</a:t>
+              <a:t>Grant partner deck  ·  9/11</a:t>
             </a:r>
           </a:p>
         </p:txBody>
